--- a/research-materials/slides/08_発表②_202703_CHIIR2027_英語発表.pptx
+++ b/research-materials/slides/08_発表②_202703_CHIIR2027_英語発表.pptx
@@ -154,8 +154,11 @@
                 <a:solidFill>
                   <a:srgbClr val="0B3C6E"/>
                 </a:solidFill>
+                <a:latin typeface="BIZ UDPゴシック"/>
+                <a:ea typeface="BIZ UDPゴシック"/>
+                <a:cs typeface="BIZ UDPゴシック"/>
               </a:rPr>
-              <a:t>Path coefficients (personality |β| ≤ .21)</a:t>
+              <a:t>Path coefficients</a:t>
             </a:r>
           </a:p>
         </c:rich>
@@ -177,7 +180,7 @@
               <c:strCache>
                 <c:ptCount val="1"/>
                 <c:pt idx="0">
-                  <c:v>β</c:v>
+                  <c:v>coef.</c:v>
                 </c:pt>
               </c:strCache>
             </c:strRef>
@@ -277,6 +280,9 @@
                   <a:solidFill>
                     <a:srgbClr val="24303F"/>
                   </a:solidFill>
+                  <a:latin typeface="BIZ UDPゴシック"/>
+                  <a:ea typeface="BIZ UDPゴシック"/>
+                  <a:cs typeface="BIZ UDPゴシック"/>
                 </a:defRPr>
               </a:pPr>
             </a:p>
@@ -320,6 +326,9 @@
                 <a:solidFill>
                   <a:srgbClr val="24303F"/>
                 </a:solidFill>
+                <a:latin typeface="BIZ UDPゴシック"/>
+                <a:ea typeface="BIZ UDPゴシック"/>
+                <a:cs typeface="BIZ UDPゴシック"/>
               </a:defRPr>
             </a:pPr>
           </a:p>
@@ -366,6 +375,9 @@
                 <a:solidFill>
                   <a:srgbClr val="5A6676"/>
                 </a:solidFill>
+                <a:latin typeface="BIZ UDPゴシック"/>
+                <a:ea typeface="BIZ UDPゴシック"/>
+                <a:cs typeface="BIZ UDPゴシック"/>
               </a:defRPr>
             </a:pPr>
           </a:p>
@@ -386,9 +398,16 @@
           <a:solidFill>
             <a:srgbClr val="5A6676"/>
           </a:solidFill>
+          <a:latin typeface="BIZ UDPゴシック"/>
+          <a:ea typeface="BIZ UDPゴシック"/>
+          <a:cs typeface="BIZ UDPゴシック"/>
         </a:defRPr>
       </a:pPr>
-      <a:endParaRPr lang="en-US"/>
+      <a:endParaRPr lang="en-US">
+        <a:latin typeface="BIZ UDPゴシック"/>
+        <a:ea typeface="BIZ UDPゴシック"/>
+        <a:cs typeface="BIZ UDPゴシック"/>
+      </a:endParaRPr>
     </a:p>
   </c:txPr>
   <c:externalData r:id="rId1">
@@ -412,6 +431,9 @@
                 <a:solidFill>
                   <a:srgbClr val="0B3C6E"/>
                 </a:solidFill>
+                <a:latin typeface="BIZ UDPゴシック"/>
+                <a:ea typeface="BIZ UDPゴシック"/>
+                <a:cs typeface="BIZ UDPゴシック"/>
               </a:rPr>
               <a:t>More people want MORE than less</a:t>
             </a:r>
@@ -517,6 +539,9 @@
                   <a:solidFill>
                     <a:srgbClr val="24303F"/>
                   </a:solidFill>
+                  <a:latin typeface="BIZ UDPゴシック"/>
+                  <a:ea typeface="BIZ UDPゴシック"/>
+                  <a:cs typeface="BIZ UDPゴシック"/>
                 </a:defRPr>
               </a:pPr>
             </a:p>
@@ -560,6 +585,9 @@
                 <a:solidFill>
                   <a:srgbClr val="24303F"/>
                 </a:solidFill>
+                <a:latin typeface="BIZ UDPゴシック"/>
+                <a:ea typeface="BIZ UDPゴシック"/>
+                <a:cs typeface="BIZ UDPゴシック"/>
               </a:defRPr>
             </a:pPr>
           </a:p>
@@ -606,6 +634,9 @@
                 <a:solidFill>
                   <a:srgbClr val="5A6676"/>
                 </a:solidFill>
+                <a:latin typeface="BIZ UDPゴシック"/>
+                <a:ea typeface="BIZ UDPゴシック"/>
+                <a:cs typeface="BIZ UDPゴシック"/>
               </a:defRPr>
             </a:pPr>
           </a:p>
@@ -625,9 +656,16 @@
           <a:solidFill>
             <a:srgbClr val="5A6676"/>
           </a:solidFill>
+          <a:latin typeface="BIZ UDPゴシック"/>
+          <a:ea typeface="BIZ UDPゴシック"/>
+          <a:cs typeface="BIZ UDPゴシック"/>
         </a:defRPr>
       </a:pPr>
-      <a:endParaRPr lang="en-US"/>
+      <a:endParaRPr lang="en-US">
+        <a:latin typeface="BIZ UDPゴシック"/>
+        <a:ea typeface="BIZ UDPゴシック"/>
+        <a:cs typeface="BIZ UDPゴシック"/>
+      </a:endParaRPr>
     </a:p>
   </c:txPr>
   <c:externalData r:id="rId1">
@@ -650,6 +688,9 @@
                 <a:solidFill>
                   <a:srgbClr val="0B3C6E"/>
                 </a:solidFill>
+                <a:latin typeface="BIZ UDPゴシック"/>
+                <a:ea typeface="BIZ UDPゴシック"/>
+                <a:cs typeface="BIZ UDPゴシック"/>
               </a:rPr>
               <a:t>Three Pareto-optimal options (example)</a:t>
             </a:r>
@@ -709,6 +750,9 @@
                         <a:solidFill>
                           <a:srgbClr val="E07A10"/>
                         </a:solidFill>
+                        <a:latin typeface="BIZ UDPゴシック"/>
+                        <a:ea typeface="BIZ UDPゴシック"/>
+                        <a:cs typeface="BIZ UDPゴシック"/>
                       </a:rPr>
                       <a:t>As is</a:t>
                     </a:r>
@@ -803,6 +847,9 @@
                         <a:solidFill>
                           <a:srgbClr val="12A38A"/>
                         </a:solidFill>
+                        <a:latin typeface="BIZ UDPゴシック"/>
+                        <a:ea typeface="BIZ UDPゴシック"/>
+                        <a:cs typeface="BIZ UDPゴシック"/>
                       </a:rPr>
                       <a:t>① Keep-the-joy</a:t>
                     </a:r>
@@ -897,6 +944,9 @@
                         <a:solidFill>
                           <a:srgbClr val="12A38A"/>
                         </a:solidFill>
+                        <a:latin typeface="BIZ UDPゴシック"/>
+                        <a:ea typeface="BIZ UDPゴシック"/>
+                        <a:cs typeface="BIZ UDPゴシック"/>
                       </a:rPr>
                       <a:t>② Balanced</a:t>
                     </a:r>
@@ -991,6 +1041,9 @@
                         <a:solidFill>
                           <a:srgbClr val="12A38A"/>
                         </a:solidFill>
+                        <a:latin typeface="BIZ UDPゴシック"/>
+                        <a:ea typeface="BIZ UDPゴシック"/>
+                        <a:cs typeface="BIZ UDPゴシック"/>
                       </a:rPr>
                       <a:t>③ Recovery-first</a:t>
                     </a:r>
@@ -1071,6 +1124,9 @@
                     <a:solidFill>
                       <a:srgbClr val="0B3C6E"/>
                     </a:solidFill>
+                    <a:latin typeface="BIZ UDPゴシック"/>
+                    <a:ea typeface="BIZ UDPゴシック"/>
+                    <a:cs typeface="BIZ UDPゴシック"/>
                   </a:rPr>
                   <a:t>Predicted fatigue (lower is better)</a:t>
                 </a:r>
@@ -1100,6 +1156,9 @@
                 <a:solidFill>
                   <a:srgbClr val="5A6676"/>
                 </a:solidFill>
+                <a:latin typeface="BIZ UDPゴシック"/>
+                <a:ea typeface="BIZ UDPゴシック"/>
+                <a:cs typeface="BIZ UDPゴシック"/>
               </a:defRPr>
             </a:pPr>
           </a:p>
@@ -1138,6 +1197,9 @@
                     <a:solidFill>
                       <a:srgbClr val="0B3C6E"/>
                     </a:solidFill>
+                    <a:latin typeface="BIZ UDPゴシック"/>
+                    <a:ea typeface="BIZ UDPゴシック"/>
+                    <a:cs typeface="BIZ UDPゴシック"/>
                   </a:rPr>
                   <a:t>Predicted fulfilment</a:t>
                 </a:r>
@@ -1167,6 +1229,9 @@
                 <a:solidFill>
                   <a:srgbClr val="5A6676"/>
                 </a:solidFill>
+                <a:latin typeface="BIZ UDPゴシック"/>
+                <a:ea typeface="BIZ UDPゴシック"/>
+                <a:cs typeface="BIZ UDPゴシック"/>
               </a:defRPr>
             </a:pPr>
           </a:p>
@@ -1190,9 +1255,16 @@
           <a:solidFill>
             <a:srgbClr val="5A6676"/>
           </a:solidFill>
+          <a:latin typeface="BIZ UDPゴシック"/>
+          <a:ea typeface="BIZ UDPゴシック"/>
+          <a:cs typeface="BIZ UDPゴシック"/>
         </a:defRPr>
       </a:pPr>
-      <a:endParaRPr lang="en-US"/>
+      <a:endParaRPr lang="en-US">
+        <a:latin typeface="BIZ UDPゴシック"/>
+        <a:ea typeface="BIZ UDPゴシック"/>
+        <a:cs typeface="BIZ UDPゴシック"/>
+      </a:endParaRPr>
     </a:p>
   </c:txPr>
   <c:externalData r:id="rId1">
@@ -1216,8 +1288,11 @@
                 <a:solidFill>
                   <a:srgbClr val="0B3C6E"/>
                 </a:solidFill>
+                <a:latin typeface="BIZ UDPゴシック"/>
+                <a:ea typeface="BIZ UDPゴシック"/>
+                <a:cs typeface="BIZ UDPゴシック"/>
               </a:rPr>
-              <a:t>Followed through on the chosen proposal (%)</a:t>
+              <a:t>Proposal follow-through (%)</a:t>
             </a:r>
           </a:p>
         </c:rich>
@@ -1276,6 +1351,9 @@
                     <a:solidFill>
                       <a:srgbClr val="0099FF"/>
                     </a:solidFill>
+                    <a:latin typeface="BIZ UDPゴシック"/>
+                    <a:ea typeface="BIZ UDPゴシック"/>
+                    <a:cs typeface="BIZ UDPゴシック"/>
                   </a:defRPr>
                 </a:pPr>
               </a:p>
@@ -1378,6 +1456,9 @@
                     <a:solidFill>
                       <a:srgbClr val="12A38A"/>
                     </a:solidFill>
+                    <a:latin typeface="BIZ UDPゴシック"/>
+                    <a:ea typeface="BIZ UDPゴシック"/>
+                    <a:cs typeface="BIZ UDPゴシック"/>
                   </a:defRPr>
                 </a:pPr>
               </a:p>
@@ -1465,6 +1546,9 @@
                 <a:solidFill>
                   <a:srgbClr val="24303F"/>
                 </a:solidFill>
+                <a:latin typeface="BIZ UDPゴシック"/>
+                <a:ea typeface="BIZ UDPゴシック"/>
+                <a:cs typeface="BIZ UDPゴシック"/>
               </a:defRPr>
             </a:pPr>
           </a:p>
@@ -1511,6 +1595,9 @@
                 <a:solidFill>
                   <a:srgbClr val="5A6676"/>
                 </a:solidFill>
+                <a:latin typeface="BIZ UDPゴシック"/>
+                <a:ea typeface="BIZ UDPゴシック"/>
+                <a:cs typeface="BIZ UDPゴシック"/>
               </a:defRPr>
             </a:pPr>
           </a:p>
@@ -1529,7 +1616,11 @@
         <a:lstStyle/>
         <a:p>
           <a:pPr>
-            <a:defRPr sz="1100"/>
+            <a:defRPr sz="1100">
+              <a:latin typeface="BIZ UDPゴシック"/>
+              <a:ea typeface="BIZ UDPゴシック"/>
+              <a:cs typeface="BIZ UDPゴシック"/>
+            </a:defRPr>
           </a:pPr>
         </a:p>
       </c:txPr>
@@ -1547,9 +1638,16 @@
           <a:solidFill>
             <a:srgbClr val="5A6676"/>
           </a:solidFill>
+          <a:latin typeface="BIZ UDPゴシック"/>
+          <a:ea typeface="BIZ UDPゴシック"/>
+          <a:cs typeface="BIZ UDPゴシック"/>
         </a:defRPr>
       </a:pPr>
-      <a:endParaRPr lang="en-US"/>
+      <a:endParaRPr lang="en-US">
+        <a:latin typeface="BIZ UDPゴシック"/>
+        <a:ea typeface="BIZ UDPゴシック"/>
+        <a:cs typeface="BIZ UDPゴシック"/>
+      </a:endParaRPr>
     </a:p>
   </c:txPr>
   <c:externalData r:id="rId1">
@@ -1573,6 +1671,9 @@
                 <a:solidFill>
                   <a:srgbClr val="0B3C6E"/>
                 </a:solidFill>
+                <a:latin typeface="BIZ UDPゴシック"/>
+                <a:ea typeface="BIZ UDPゴシック"/>
+                <a:cs typeface="BIZ UDPゴシック"/>
               </a:rPr>
               <a:t>WHO-5 (raw 0–25)</a:t>
             </a:r>
@@ -1636,6 +1737,9 @@
                       <a:solidFill>
                         <a:srgbClr val="8FA3B8"/>
                       </a:solidFill>
+                      <a:latin typeface="BIZ UDPゴシック"/>
+                      <a:ea typeface="BIZ UDPゴシック"/>
+                      <a:cs typeface="BIZ UDPゴシック"/>
                     </a:defRPr>
                   </a:pPr>
                 </a:p>
@@ -1748,6 +1852,9 @@
                       <a:solidFill>
                         <a:srgbClr val="0099FF"/>
                       </a:solidFill>
+                      <a:latin typeface="BIZ UDPゴシック"/>
+                      <a:ea typeface="BIZ UDPゴシック"/>
+                      <a:cs typeface="BIZ UDPゴシック"/>
                     </a:defRPr>
                   </a:pPr>
                 </a:p>
@@ -1860,6 +1967,9 @@
                       <a:solidFill>
                         <a:srgbClr val="12A38A"/>
                       </a:solidFill>
+                      <a:latin typeface="BIZ UDPゴシック"/>
+                      <a:ea typeface="BIZ UDPゴシック"/>
+                      <a:cs typeface="BIZ UDPゴシック"/>
                     </a:defRPr>
                   </a:pPr>
                 </a:p>
@@ -1954,6 +2064,9 @@
                 <a:solidFill>
                   <a:srgbClr val="24303F"/>
                 </a:solidFill>
+                <a:latin typeface="BIZ UDPゴシック"/>
+                <a:ea typeface="BIZ UDPゴシック"/>
+                <a:cs typeface="BIZ UDPゴシック"/>
               </a:defRPr>
             </a:pPr>
           </a:p>
@@ -2000,6 +2113,9 @@
                 <a:solidFill>
                   <a:srgbClr val="5A6676"/>
                 </a:solidFill>
+                <a:latin typeface="BIZ UDPゴシック"/>
+                <a:ea typeface="BIZ UDPゴシック"/>
+                <a:cs typeface="BIZ UDPゴシック"/>
               </a:defRPr>
             </a:pPr>
           </a:p>
@@ -2018,7 +2134,11 @@
         <a:lstStyle/>
         <a:p>
           <a:pPr>
-            <a:defRPr sz="1100"/>
+            <a:defRPr sz="1100">
+              <a:latin typeface="BIZ UDPゴシック"/>
+              <a:ea typeface="BIZ UDPゴシック"/>
+              <a:cs typeface="BIZ UDPゴシック"/>
+            </a:defRPr>
           </a:pPr>
         </a:p>
       </c:txPr>
@@ -2036,9 +2156,16 @@
           <a:solidFill>
             <a:srgbClr val="5A6676"/>
           </a:solidFill>
+          <a:latin typeface="BIZ UDPゴシック"/>
+          <a:ea typeface="BIZ UDPゴシック"/>
+          <a:cs typeface="BIZ UDPゴシック"/>
         </a:defRPr>
       </a:pPr>
-      <a:endParaRPr lang="en-US"/>
+      <a:endParaRPr lang="en-US">
+        <a:latin typeface="BIZ UDPゴシック"/>
+        <a:ea typeface="BIZ UDPゴシック"/>
+        <a:cs typeface="BIZ UDPゴシック"/>
+      </a:endParaRPr>
     </a:p>
   </c:txPr>
   <c:externalData r:id="rId1">
@@ -2062,6 +2189,9 @@
                 <a:solidFill>
                   <a:srgbClr val="0B3C6E"/>
                 </a:solidFill>
+                <a:latin typeface="BIZ UDPゴシック"/>
+                <a:ea typeface="BIZ UDPゴシック"/>
+                <a:cs typeface="BIZ UDPゴシック"/>
               </a:rPr>
               <a:t>Weekly logging rate (%)</a:t>
             </a:r>
@@ -2125,6 +2255,9 @@
                       <a:solidFill>
                         <a:srgbClr val="8FA3B8"/>
                       </a:solidFill>
+                      <a:latin typeface="BIZ UDPゴシック"/>
+                      <a:ea typeface="BIZ UDPゴシック"/>
+                      <a:cs typeface="BIZ UDPゴシック"/>
                     </a:defRPr>
                   </a:pPr>
                 </a:p>
@@ -2249,6 +2382,9 @@
                       <a:solidFill>
                         <a:srgbClr val="0099FF"/>
                       </a:solidFill>
+                      <a:latin typeface="BIZ UDPゴシック"/>
+                      <a:ea typeface="BIZ UDPゴシック"/>
+                      <a:cs typeface="BIZ UDPゴシック"/>
                     </a:defRPr>
                   </a:pPr>
                 </a:p>
@@ -2373,6 +2509,9 @@
                       <a:solidFill>
                         <a:srgbClr val="12A38A"/>
                       </a:solidFill>
+                      <a:latin typeface="BIZ UDPゴシック"/>
+                      <a:ea typeface="BIZ UDPゴシック"/>
+                      <a:cs typeface="BIZ UDPゴシック"/>
                     </a:defRPr>
                   </a:pPr>
                 </a:p>
@@ -2479,6 +2618,9 @@
                 <a:solidFill>
                   <a:srgbClr val="24303F"/>
                 </a:solidFill>
+                <a:latin typeface="BIZ UDPゴシック"/>
+                <a:ea typeface="BIZ UDPゴシック"/>
+                <a:cs typeface="BIZ UDPゴシック"/>
               </a:defRPr>
             </a:pPr>
           </a:p>
@@ -2525,6 +2667,9 @@
                 <a:solidFill>
                   <a:srgbClr val="5A6676"/>
                 </a:solidFill>
+                <a:latin typeface="BIZ UDPゴシック"/>
+                <a:ea typeface="BIZ UDPゴシック"/>
+                <a:cs typeface="BIZ UDPゴシック"/>
               </a:defRPr>
             </a:pPr>
           </a:p>
@@ -2543,7 +2688,11 @@
         <a:lstStyle/>
         <a:p>
           <a:pPr>
-            <a:defRPr sz="1100"/>
+            <a:defRPr sz="1100">
+              <a:latin typeface="BIZ UDPゴシック"/>
+              <a:ea typeface="BIZ UDPゴシック"/>
+              <a:cs typeface="BIZ UDPゴシック"/>
+            </a:defRPr>
           </a:pPr>
         </a:p>
       </c:txPr>
@@ -2561,9 +2710,16 @@
           <a:solidFill>
             <a:srgbClr val="5A6676"/>
           </a:solidFill>
+          <a:latin typeface="BIZ UDPゴシック"/>
+          <a:ea typeface="BIZ UDPゴシック"/>
+          <a:cs typeface="BIZ UDPゴシック"/>
         </a:defRPr>
       </a:pPr>
-      <a:endParaRPr lang="en-US"/>
+      <a:endParaRPr lang="en-US">
+        <a:latin typeface="BIZ UDPゴシック"/>
+        <a:ea typeface="BIZ UDPゴシック"/>
+        <a:cs typeface="BIZ UDPゴシック"/>
+      </a:endParaRPr>
     </a:p>
   </c:txPr>
   <c:externalData r:id="rId1">
@@ -6834,7 +6990,7 @@
         <p:spPr>
           <a:xfrm>
             <a:off x="0" y="855796"/>
-            <a:ext cx="5115503" cy="300082"/>
+            <a:ext cx="6200000" cy="300082"/>
           </a:xfrm>
           <a:prstGeom prst="rect">
             <a:avLst/>
@@ -7287,6 +7443,9 @@
                 <a:solidFill>
                   <a:srgbClr val="24303F"/>
                 </a:solidFill>
+                <a:latin typeface="BIZ UDPゴシック"/>
+                <a:ea typeface="BIZ UDPゴシック"/>
+                <a:cs typeface="BIZ UDPゴシック"/>
               </a:rPr>
               <a:t>OshiFit: Possible-Selves Avatars for</a:t>
             </a:r>
@@ -7303,6 +7462,9 @@
                 <a:solidFill>
                   <a:srgbClr val="24303F"/>
                 </a:solidFill>
+                <a:latin typeface="BIZ UDPゴシック"/>
+                <a:ea typeface="BIZ UDPゴシック"/>
+                <a:cs typeface="BIZ UDPゴシック"/>
               </a:rPr>
               <a:t>Uncertainty-Aware Behavior Change in Fan Activities</a:t>
             </a:r>
@@ -7337,6 +7499,9 @@
                 <a:solidFill>
                   <a:srgbClr val="24303F"/>
                 </a:solidFill>
+                <a:latin typeface="BIZ UDPゴシック"/>
+                <a:ea typeface="BIZ UDPゴシック"/>
+                <a:cs typeface="BIZ UDPゴシック"/>
               </a:rPr>
               <a:t>Gen Imai, Sho Ooi</a:t>
             </a:r>
@@ -7378,6 +7543,9 @@
                 <a:solidFill>
                   <a:srgbClr val="24303F"/>
                 </a:solidFill>
+                <a:latin typeface="BIZ UDPゴシック"/>
+                <a:ea typeface="BIZ UDPゴシック"/>
+                <a:cs typeface="BIZ UDPゴシック"/>
               </a:rPr>
               <a:t>ACM CHIIR 2027 · Short Paper</a:t>
             </a:r>
@@ -7417,6 +7585,9 @@
                 <a:solidFill>
                   <a:srgbClr val="24303F"/>
                 </a:solidFill>
+                <a:latin typeface="BIZ UDPゴシック"/>
+                <a:ea typeface="BIZ UDPゴシック"/>
+                <a:cs typeface="BIZ UDPゴシック"/>
               </a:rPr>
               <a:t>Osaka Institute of Technology</a:t>
             </a:r>
@@ -7433,6 +7604,9 @@
                 <a:solidFill>
                   <a:srgbClr val="24303F"/>
                 </a:solidFill>
+                <a:latin typeface="BIZ UDPゴシック"/>
+                <a:ea typeface="BIZ UDPゴシック"/>
+                <a:cs typeface="BIZ UDPゴシック"/>
               </a:rPr>
               <a:t>Media Interaction Laboratory</a:t>
             </a:r>
@@ -7475,6 +7649,9 @@
                 <a:solidFill>
                   <a:srgbClr val="FFFFFF"/>
                 </a:solidFill>
+                <a:latin typeface="BIZ UDPゴシック"/>
+                <a:ea typeface="BIZ UDPゴシック"/>
+                <a:cs typeface="BIZ UDPゴシック"/>
               </a:rPr>
               <a:t>Show the future honestly —</a:t>
             </a:r>
@@ -7494,6 +7671,9 @@
                 <a:solidFill>
                   <a:srgbClr val="FFFFFF"/>
                 </a:solidFill>
+                <a:latin typeface="BIZ UDPゴシック"/>
+                <a:ea typeface="BIZ UDPゴシック"/>
+                <a:cs typeface="BIZ UDPゴシック"/>
               </a:rPr>
               <a:t>and let people choose how to love what they love</a:t>
             </a:r>
@@ -7570,6 +7750,9 @@
                 <a:solidFill>
                   <a:srgbClr val="24303F"/>
                 </a:solidFill>
+                <a:latin typeface="BIZ UDPゴシック"/>
+                <a:ea typeface="BIZ UDPゴシック"/>
+                <a:cs typeface="BIZ UDPゴシック"/>
               </a:rPr>
               <a:t>Results: avatars boosted follow-through</a:t>
             </a:r>
@@ -7588,9 +7771,14 @@
         </p:nvSpPr>
         <p:spPr/>
         <p:txBody>
-          <a:bodyPr/>
-          <a:p>
-            <a:r>
+          <a:bodyPr lIns="27432" rIns="0" wrap="none"/>
+          <a:p>
+            <a:r>
+              <a:rPr sz="900">
+                <a:latin typeface="BIZ UDPゴシック"/>
+                <a:ea typeface="BIZ UDPゴシック"/>
+                <a:cs typeface="BIZ UDPゴシック"/>
+              </a:rPr>
               <a:t>2027/3/8</a:t>
             </a:r>
           </a:p>
@@ -7611,7 +7799,11 @@
           <a:bodyPr/>
           <a:p>
             <a:fld id="{B6F15528-21DE-4FAA-801E-634DDDAF4B2B}" type="slidenum">
-              <a:rPr lang="en-US"/>
+              <a:rPr lang="en-US">
+                <a:latin typeface="BIZ UDPゴシック"/>
+                <a:ea typeface="BIZ UDPゴシック"/>
+                <a:cs typeface="BIZ UDPゴシック"/>
+              </a:rPr>
               <a:t>10</a:t>
             </a:fld>
           </a:p>
@@ -7668,6 +7860,9 @@
                 <a:solidFill>
                   <a:srgbClr val="5A6676"/>
                 </a:solidFill>
+                <a:latin typeface="BIZ UDPゴシック"/>
+                <a:ea typeface="BIZ UDPゴシック"/>
+                <a:cs typeface="BIZ UDPゴシック"/>
               </a:rPr>
               <a:t>N = 197 completed (after the paper was submitted). Same proposals in B and C.</a:t>
             </a:r>
@@ -7751,6 +7946,9 @@
                 <a:solidFill>
                   <a:srgbClr val="12A38A"/>
                 </a:solidFill>
+                <a:latin typeface="BIZ UDPゴシック"/>
+                <a:ea typeface="BIZ UDPゴシック"/>
+                <a:cs typeface="BIZ UDPゴシック"/>
               </a:rPr>
               <a:t>OR = 1.71</a:t>
             </a:r>
@@ -7767,6 +7965,9 @@
                 <a:solidFill>
                   <a:srgbClr val="24303F"/>
                 </a:solidFill>
+                <a:latin typeface="BIZ UDPゴシック"/>
+                <a:ea typeface="BIZ UDPゴシック"/>
+                <a:cs typeface="BIZ UDPゴシック"/>
               </a:rPr>
               <a:t>95% CI 1.18–2.48, p = .005</a:t>
             </a:r>
@@ -7783,6 +7984,9 @@
                 <a:solidFill>
                   <a:srgbClr val="5A6676"/>
                 </a:solidFill>
+                <a:latin typeface="BIZ UDPゴシック"/>
+                <a:ea typeface="BIZ UDPゴシック"/>
+                <a:cs typeface="BIZ UDPゴシック"/>
               </a:rPr>
               <a:t>RQ2 · C vs B</a:t>
             </a:r>
@@ -7874,6 +8078,9 @@
                 <a:solidFill>
                   <a:srgbClr val="0B3C6E"/>
                 </a:solidFill>
+                <a:latin typeface="BIZ UDPゴシック"/>
+                <a:ea typeface="BIZ UDPゴシック"/>
+                <a:cs typeface="BIZ UDPゴシック"/>
               </a:rPr>
               <a:t>Forecasts got better and stayed honest (RQ1)</a:t>
             </a:r>
@@ -7886,7 +8093,7 @@
               <a:buClr>
                 <a:srgbClr val="0099FF"/>
               </a:buClr>
-              <a:buFont typeface="Arial"/>
+              <a:buFont typeface="BIZ UDPゴシック"/>
               <a:buChar char="•"/>
             </a:pPr>
             <a:r>
@@ -7894,6 +8101,9 @@
                 <a:solidFill>
                   <a:srgbClr val="24303F"/>
                 </a:solidFill>
+                <a:latin typeface="BIZ UDPゴシック"/>
+                <a:ea typeface="BIZ UDPゴシック"/>
+                <a:cs typeface="BIZ UDPゴシック"/>
               </a:rPr>
               <a:t>Fatigue error 0.84 → 0.62 after personalization</a:t>
             </a:r>
@@ -7906,7 +8116,7 @@
               <a:buClr>
                 <a:srgbClr val="0099FF"/>
               </a:buClr>
-              <a:buFont typeface="Arial"/>
+              <a:buFont typeface="BIZ UDPゴシック"/>
               <a:buChar char="•"/>
             </a:pPr>
             <a:r>
@@ -7914,6 +8124,9 @@
                 <a:solidFill>
                   <a:srgbClr val="24303F"/>
                 </a:solidFill>
+                <a:latin typeface="BIZ UDPゴシック"/>
+                <a:ea typeface="BIZ UDPゴシック"/>
+                <a:cs typeface="BIZ UDPゴシック"/>
               </a:rPr>
               <a:t>76% of outcomes fell inside the 80% interval</a:t>
             </a:r>
@@ -7977,6 +8190,9 @@
                 <a:solidFill>
                   <a:srgbClr val="E8457C"/>
                 </a:solidFill>
+                <a:latin typeface="BIZ UDPゴシック"/>
+                <a:ea typeface="BIZ UDPゴシック"/>
+                <a:cs typeface="BIZ UDPゴシック"/>
               </a:rPr>
               <a:t>※ 想定値 (projected) — 要差し替え</a:t>
             </a:r>
@@ -8029,6 +8245,9 @@
                 <a:solidFill>
                   <a:srgbClr val="24303F"/>
                 </a:solidFill>
+                <a:latin typeface="BIZ UDPゴシック"/>
+                <a:ea typeface="BIZ UDPゴシック"/>
+                <a:cs typeface="BIZ UDPゴシック"/>
               </a:rPr>
               <a:t>Results: well-being, joy, and logging</a:t>
             </a:r>
@@ -8047,9 +8266,14 @@
         </p:nvSpPr>
         <p:spPr/>
         <p:txBody>
-          <a:bodyPr/>
-          <a:p>
-            <a:r>
+          <a:bodyPr lIns="27432" rIns="0" wrap="none"/>
+          <a:p>
+            <a:r>
+              <a:rPr sz="900">
+                <a:latin typeface="BIZ UDPゴシック"/>
+                <a:ea typeface="BIZ UDPゴシック"/>
+                <a:cs typeface="BIZ UDPゴシック"/>
+              </a:rPr>
               <a:t>2027/3/8</a:t>
             </a:r>
           </a:p>
@@ -8070,7 +8294,11 @@
           <a:bodyPr/>
           <a:p>
             <a:fld id="{B6F15528-21DE-4FAA-801E-634DDDAF4B2B}" type="slidenum">
-              <a:rPr lang="en-US"/>
+              <a:rPr lang="en-US">
+                <a:latin typeface="BIZ UDPゴシック"/>
+                <a:ea typeface="BIZ UDPゴシック"/>
+                <a:cs typeface="BIZ UDPゴシック"/>
+              </a:rPr>
               <a:t>11</a:t>
             </a:fld>
           </a:p>
@@ -8197,6 +8425,9 @@
                 <a:solidFill>
                   <a:srgbClr val="E07A10"/>
                 </a:solidFill>
+                <a:latin typeface="BIZ UDPゴシック"/>
+                <a:ea typeface="BIZ UDPゴシック"/>
+                <a:cs typeface="BIZ UDPゴシック"/>
               </a:rPr>
               <a:t>RQ3: small effect</a:t>
             </a:r>
@@ -8213,6 +8444,9 @@
                 <a:solidFill>
                   <a:srgbClr val="24303F"/>
                 </a:solidFill>
+                <a:latin typeface="BIZ UDPゴシック"/>
+                <a:ea typeface="BIZ UDPゴシック"/>
+                <a:cs typeface="BIZ UDPゴシック"/>
               </a:rPr>
               <a:t>C − B = +0.9 (n.s. after Holm); C − A = +1.7 (exploratory)</a:t>
             </a:r>
@@ -8304,6 +8538,9 @@
                 <a:solidFill>
                   <a:srgbClr val="12A38A"/>
                 </a:solidFill>
+                <a:latin typeface="BIZ UDPゴシック"/>
+                <a:ea typeface="BIZ UDPゴシック"/>
+                <a:cs typeface="BIZ UDPゴシック"/>
               </a:rPr>
               <a:t>Joy was kept</a:t>
             </a:r>
@@ -8320,6 +8557,9 @@
                 <a:solidFill>
                   <a:srgbClr val="24303F"/>
                 </a:solidFill>
+                <a:latin typeface="BIZ UDPゴシック"/>
+                <a:ea typeface="BIZ UDPゴシック"/>
+                <a:cs typeface="BIZ UDPゴシック"/>
               </a:rPr>
               <a:t>Enjoyment stayed at 3.8–3.9 in all groups</a:t>
             </a:r>
@@ -8411,6 +8651,9 @@
                 <a:solidFill>
                   <a:srgbClr val="0B3C6E"/>
                 </a:solidFill>
+                <a:latin typeface="BIZ UDPゴシック"/>
+                <a:ea typeface="BIZ UDPゴシック"/>
+                <a:cs typeface="BIZ UDPゴシック"/>
               </a:rPr>
               <a:t>People kept logging</a:t>
             </a:r>
@@ -8427,6 +8670,9 @@
                 <a:solidFill>
                   <a:srgbClr val="24303F"/>
                 </a:solidFill>
+                <a:latin typeface="BIZ UDPゴシック"/>
+                <a:ea typeface="BIZ UDPゴシック"/>
+                <a:cs typeface="BIZ UDPゴシック"/>
               </a:rPr>
               <a:t>Group C: 83% in week 6 (exploratory)</a:t>
             </a:r>
@@ -8490,6 +8736,9 @@
                 <a:solidFill>
                   <a:srgbClr val="E8457C"/>
                 </a:solidFill>
+                <a:latin typeface="BIZ UDPゴシック"/>
+                <a:ea typeface="BIZ UDPゴシック"/>
+                <a:cs typeface="BIZ UDPゴシック"/>
               </a:rPr>
               <a:t>※ 想定値 (projected) — 要差し替え</a:t>
             </a:r>
@@ -8542,6 +8791,9 @@
                 <a:solidFill>
                   <a:srgbClr val="24303F"/>
                 </a:solidFill>
+                <a:latin typeface="BIZ UDPゴシック"/>
+                <a:ea typeface="BIZ UDPゴシック"/>
+                <a:cs typeface="BIZ UDPゴシック"/>
               </a:rPr>
               <a:t>Design implications</a:t>
             </a:r>
@@ -8560,9 +8812,14 @@
         </p:nvSpPr>
         <p:spPr/>
         <p:txBody>
-          <a:bodyPr/>
-          <a:p>
-            <a:r>
+          <a:bodyPr lIns="27432" rIns="0" wrap="none"/>
+          <a:p>
+            <a:r>
+              <a:rPr sz="900">
+                <a:latin typeface="BIZ UDPゴシック"/>
+                <a:ea typeface="BIZ UDPゴシック"/>
+                <a:cs typeface="BIZ UDPゴシック"/>
+              </a:rPr>
               <a:t>2027/3/8</a:t>
             </a:r>
           </a:p>
@@ -8583,7 +8840,11 @@
           <a:bodyPr/>
           <a:p>
             <a:fld id="{B6F15528-21DE-4FAA-801E-634DDDAF4B2B}" type="slidenum">
-              <a:rPr lang="en-US"/>
+              <a:rPr lang="en-US">
+                <a:latin typeface="BIZ UDPゴシック"/>
+                <a:ea typeface="BIZ UDPゴシック"/>
+                <a:cs typeface="BIZ UDPゴシック"/>
+              </a:rPr>
               <a:t>12</a:t>
             </a:fld>
           </a:p>
@@ -8740,6 +9001,9 @@
                 <a:solidFill>
                   <a:srgbClr val="0B3C6E"/>
                 </a:solidFill>
+                <a:latin typeface="BIZ UDPゴシック"/>
+                <a:ea typeface="BIZ UDPゴシック"/>
+                <a:cs typeface="BIZ UDPゴシック"/>
               </a:rPr>
               <a:t>Make uncertainty a feature</a:t>
             </a:r>
@@ -8756,6 +9020,9 @@
                 <a:solidFill>
                   <a:srgbClr val="24303F"/>
                 </a:solidFill>
+                <a:latin typeface="BIZ UDPゴシック"/>
+                <a:ea typeface="BIZ UDPゴシック"/>
+                <a:cs typeface="BIZ UDPゴシック"/>
               </a:rPr>
               <a:t>Render forecast ranges as possible selves; let resolution grow with the user's own data</a:t>
             </a:r>
@@ -8913,6 +9180,9 @@
                 <a:solidFill>
                   <a:srgbClr val="0B3C6E"/>
                 </a:solidFill>
+                <a:latin typeface="BIZ UDPゴシック"/>
+                <a:ea typeface="BIZ UDPゴシック"/>
+                <a:cs typeface="BIZ UDPゴシック"/>
               </a:rPr>
               <a:t>Rebalance, don't restrict</a:t>
             </a:r>
@@ -8929,6 +9199,9 @@
                 <a:solidFill>
                   <a:srgbClr val="24303F"/>
                 </a:solidFill>
+                <a:latin typeface="BIZ UDPゴシック"/>
+                <a:ea typeface="BIZ UDPゴシック"/>
+                <a:cs typeface="BIZ UDPゴシック"/>
               </a:rPr>
               <a:t>In domains without one right answer, keep what people love and move the rest</a:t>
             </a:r>
@@ -9086,6 +9359,9 @@
                 <a:solidFill>
                   <a:srgbClr val="0B3C6E"/>
                 </a:solidFill>
+                <a:latin typeface="BIZ UDPゴシック"/>
+                <a:ea typeface="BIZ UDPゴシック"/>
+                <a:cs typeface="BIZ UDPゴシック"/>
               </a:rPr>
               <a:t>Same advice, better framing</a:t>
             </a:r>
@@ -9102,6 +9378,9 @@
                 <a:solidFill>
                   <a:srgbClr val="24303F"/>
                 </a:solidFill>
+                <a:latin typeface="BIZ UDPゴシック"/>
+                <a:ea typeface="BIZ UDPゴシック"/>
+                <a:cs typeface="BIZ UDPゴシック"/>
               </a:rPr>
               <a:t>How a future is shown can change follow-through even when the advice is identical</a:t>
             </a:r>
@@ -9154,6 +9433,9 @@
                 <a:solidFill>
                   <a:srgbClr val="24303F"/>
                 </a:solidFill>
+                <a:latin typeface="BIZ UDPゴシック"/>
+                <a:ea typeface="BIZ UDPゴシック"/>
+                <a:cs typeface="BIZ UDPゴシック"/>
               </a:rPr>
               <a:t>Limitations and next steps</a:t>
             </a:r>
@@ -9172,9 +9454,14 @@
         </p:nvSpPr>
         <p:spPr/>
         <p:txBody>
-          <a:bodyPr/>
-          <a:p>
-            <a:r>
+          <a:bodyPr lIns="27432" rIns="0" wrap="none"/>
+          <a:p>
+            <a:r>
+              <a:rPr sz="900">
+                <a:latin typeface="BIZ UDPゴシック"/>
+                <a:ea typeface="BIZ UDPゴシック"/>
+                <a:cs typeface="BIZ UDPゴシック"/>
+              </a:rPr>
               <a:t>2027/3/8</a:t>
             </a:r>
           </a:p>
@@ -9195,7 +9482,11 @@
           <a:bodyPr/>
           <a:p>
             <a:fld id="{B6F15528-21DE-4FAA-801E-634DDDAF4B2B}" type="slidenum">
-              <a:rPr lang="en-US"/>
+              <a:rPr lang="en-US">
+                <a:latin typeface="BIZ UDPゴシック"/>
+                <a:ea typeface="BIZ UDPゴシック"/>
+                <a:cs typeface="BIZ UDPゴシック"/>
+              </a:rPr>
               <a:t>13</a:t>
             </a:fld>
           </a:p>
@@ -9352,6 +9643,9 @@
                 <a:solidFill>
                   <a:srgbClr val="0B3C6E"/>
                 </a:solidFill>
+                <a:latin typeface="BIZ UDPゴシック"/>
+                <a:ea typeface="BIZ UDPゴシック"/>
+                <a:cs typeface="BIZ UDPゴシック"/>
               </a:rPr>
               <a:t>Short and small</a:t>
             </a:r>
@@ -9391,8 +9685,11 @@
                 <a:solidFill>
                   <a:srgbClr val="24303F"/>
                 </a:solidFill>
+                <a:latin typeface="BIZ UDPゴシック"/>
+                <a:ea typeface="BIZ UDPゴシック"/>
+                <a:cs typeface="BIZ UDPゴシック"/>
               </a:rPr>
-              <a:t>6 weeks, ~65 per arm; habits take longer (median 66 days; Lally et al., 2010)</a:t>
+              <a:t>6 weeks, ≈65 per arm; habits take longer (median 66 days; Lally et al., 2010)</a:t>
             </a:r>
           </a:p>
         </p:txBody>
@@ -9548,6 +9845,9 @@
                 <a:solidFill>
                   <a:srgbClr val="0B3C6E"/>
                 </a:solidFill>
+                <a:latin typeface="BIZ UDPゴシック"/>
+                <a:ea typeface="BIZ UDPゴシック"/>
+                <a:cs typeface="BIZ UDPゴシック"/>
               </a:rPr>
               <a:t>Bundled features</a:t>
             </a:r>
@@ -9587,6 +9887,9 @@
                 <a:solidFill>
                   <a:srgbClr val="24303F"/>
                 </a:solidFill>
+                <a:latin typeface="BIZ UDPゴシック"/>
+                <a:ea typeface="BIZ UDPゴシック"/>
+                <a:cs typeface="BIZ UDPゴシック"/>
               </a:rPr>
               <a:t>Group C saw both avatars and dot counts; we cannot yet separate them</a:t>
             </a:r>
@@ -9744,6 +10047,9 @@
                 <a:solidFill>
                   <a:srgbClr val="0B3C6E"/>
                 </a:solidFill>
+                <a:latin typeface="BIZ UDPゴシック"/>
+                <a:ea typeface="BIZ UDPゴシック"/>
+                <a:cs typeface="BIZ UDPゴシック"/>
               </a:rPr>
               <a:t>Self-report</a:t>
             </a:r>
@@ -9783,6 +10089,9 @@
                 <a:solidFill>
                   <a:srgbClr val="24303F"/>
                 </a:solidFill>
+                <a:latin typeface="BIZ UDPゴシック"/>
+                <a:ea typeface="BIZ UDPゴシック"/>
+                <a:cs typeface="BIZ UDPゴシック"/>
               </a:rPr>
               <a:t>Logs and WHO-5 are self-reported; physiological signals could complement them</a:t>
             </a:r>
@@ -9940,6 +10249,9 @@
                 <a:solidFill>
                   <a:srgbClr val="0B3C6E"/>
                 </a:solidFill>
+                <a:latin typeface="BIZ UDPゴシック"/>
+                <a:ea typeface="BIZ UDPゴシック"/>
+                <a:cs typeface="BIZ UDPゴシック"/>
               </a:rPr>
               <a:t>Sample</a:t>
             </a:r>
@@ -9979,6 +10291,9 @@
                 <a:solidFill>
                   <a:srgbClr val="24303F"/>
                 </a:solidFill>
+                <a:latin typeface="BIZ UDPゴシック"/>
+                <a:ea typeface="BIZ UDPゴシック"/>
+                <a:cs typeface="BIZ UDPゴシック"/>
               </a:rPr>
               <a:t>Mostly university students and women in Japan</a:t>
             </a:r>
@@ -10062,6 +10377,9 @@
                 <a:solidFill>
                   <a:srgbClr val="0B3C6E"/>
                 </a:solidFill>
+                <a:latin typeface="BIZ UDPゴシック"/>
+                <a:ea typeface="BIZ UDPゴシック"/>
+                <a:cs typeface="BIZ UDPゴシック"/>
               </a:rPr>
               <a:t>Next: longer follow-up, factorial study of avatar vs. dots, and other domains (social media, gaming)</a:t>
             </a:r>
@@ -10078,6 +10396,9 @@
                 <a:solidFill>
                   <a:srgbClr val="24303F"/>
                 </a:solidFill>
+                <a:latin typeface="BIZ UDPゴシック"/>
+                <a:ea typeface="BIZ UDPゴシック"/>
+                <a:cs typeface="BIZ UDPゴシック"/>
               </a:rPr>
               <a:t>Toward a sustainable fan economy with platform partners</a:t>
             </a:r>
@@ -10130,6 +10451,9 @@
                 <a:solidFill>
                   <a:srgbClr val="24303F"/>
                 </a:solidFill>
+                <a:latin typeface="BIZ UDPゴシック"/>
+                <a:ea typeface="BIZ UDPゴシック"/>
+                <a:cs typeface="BIZ UDPゴシック"/>
               </a:rPr>
               <a:t>Thank you!</a:t>
             </a:r>
@@ -10148,9 +10472,14 @@
         </p:nvSpPr>
         <p:spPr/>
         <p:txBody>
-          <a:bodyPr/>
-          <a:p>
-            <a:r>
+          <a:bodyPr lIns="27432" rIns="0" wrap="none"/>
+          <a:p>
+            <a:r>
+              <a:rPr sz="900">
+                <a:latin typeface="BIZ UDPゴシック"/>
+                <a:ea typeface="BIZ UDPゴシック"/>
+                <a:cs typeface="BIZ UDPゴシック"/>
+              </a:rPr>
               <a:t>2027/3/8</a:t>
             </a:r>
           </a:p>
@@ -10171,7 +10500,11 @@
           <a:bodyPr/>
           <a:p>
             <a:fld id="{B6F15528-21DE-4FAA-801E-634DDDAF4B2B}" type="slidenum">
-              <a:rPr lang="en-US"/>
+              <a:rPr lang="en-US">
+                <a:latin typeface="BIZ UDPゴシック"/>
+                <a:ea typeface="BIZ UDPゴシック"/>
+                <a:cs typeface="BIZ UDPゴシック"/>
+              </a:rPr>
               <a:t>14</a:t>
             </a:fld>
           </a:p>
@@ -10278,6 +10611,9 @@
                 <a:solidFill>
                   <a:srgbClr val="FFFFFF"/>
                 </a:solidFill>
+                <a:latin typeface="BIZ UDPゴシック"/>
+                <a:ea typeface="BIZ UDPゴシック"/>
+                <a:cs typeface="BIZ UDPゴシック"/>
               </a:rPr>
               <a:t>OshiFit</a:t>
             </a:r>
@@ -10294,6 +10630,9 @@
                 <a:solidFill>
                   <a:srgbClr val="CCE9FF"/>
                 </a:solidFill>
+                <a:latin typeface="BIZ UDPゴシック"/>
+                <a:ea typeface="BIZ UDPゴシック"/>
+                <a:cs typeface="BIZ UDPゴシック"/>
               </a:rPr>
               <a:t>Possible-selves avatars for uncertainty-aware behavior change</a:t>
             </a:r>
@@ -10306,7 +10645,7 @@
               <a:buClr>
                 <a:srgbClr val="E8457C"/>
               </a:buClr>
-              <a:buFont typeface="Arial"/>
+              <a:buFont typeface="BIZ UDPゴシック"/>
               <a:buChar char="•"/>
             </a:pPr>
             <a:r>
@@ -10314,6 +10653,9 @@
                 <a:solidFill>
                   <a:srgbClr val="FFFFFF"/>
                 </a:solidFill>
+                <a:latin typeface="BIZ UDPゴシック"/>
+                <a:ea typeface="BIZ UDPゴシック"/>
+                <a:cs typeface="BIZ UDPゴシック"/>
               </a:rPr>
               <a:t>Show the future honestly</a:t>
             </a:r>
@@ -10326,7 +10668,7 @@
               <a:buClr>
                 <a:srgbClr val="E8457C"/>
               </a:buClr>
-              <a:buFont typeface="Arial"/>
+              <a:buFont typeface="BIZ UDPゴシック"/>
               <a:buChar char="•"/>
             </a:pPr>
             <a:r>
@@ -10334,6 +10676,9 @@
                 <a:solidFill>
                   <a:srgbClr val="FFFFFF"/>
                 </a:solidFill>
+                <a:latin typeface="BIZ UDPゴシック"/>
+                <a:ea typeface="BIZ UDPゴシック"/>
+                <a:cs typeface="BIZ UDPゴシック"/>
               </a:rPr>
               <a:t>Rebalance, don't restrict</a:t>
             </a:r>
@@ -10346,7 +10691,7 @@
               <a:buClr>
                 <a:srgbClr val="E8457C"/>
               </a:buClr>
-              <a:buFont typeface="Arial"/>
+              <a:buFont typeface="BIZ UDPゴシック"/>
               <a:buChar char="•"/>
             </a:pPr>
             <a:r>
@@ -10354,6 +10699,9 @@
                 <a:solidFill>
                   <a:srgbClr val="FFFFFF"/>
                 </a:solidFill>
+                <a:latin typeface="BIZ UDPゴシック"/>
+                <a:ea typeface="BIZ UDPゴシック"/>
+                <a:cs typeface="BIZ UDPゴシック"/>
               </a:rPr>
               <a:t>Let people choose</a:t>
             </a:r>
@@ -10370,6 +10718,9 @@
                 <a:solidFill>
                   <a:srgbClr val="CCE9FF"/>
                 </a:solidFill>
+                <a:latin typeface="BIZ UDPゴシック"/>
+                <a:ea typeface="BIZ UDPゴシック"/>
+                <a:cs typeface="BIZ UDPゴシック"/>
               </a:rPr>
               <a:t>Gen Imai · Osaka Institute of Technology</a:t>
             </a:r>
@@ -10422,6 +10773,9 @@
                 <a:solidFill>
                   <a:srgbClr val="24303F"/>
                 </a:solidFill>
+                <a:latin typeface="BIZ UDPゴシック"/>
+                <a:ea typeface="BIZ UDPゴシック"/>
+                <a:cs typeface="BIZ UDPゴシック"/>
               </a:rPr>
               <a:t>Oshi-katsu: a booming fan culture</a:t>
             </a:r>
@@ -10440,9 +10794,14 @@
         </p:nvSpPr>
         <p:spPr/>
         <p:txBody>
-          <a:bodyPr/>
-          <a:p>
-            <a:r>
+          <a:bodyPr lIns="27432" rIns="0" wrap="none"/>
+          <a:p>
+            <a:r>
+              <a:rPr sz="900">
+                <a:latin typeface="BIZ UDPゴシック"/>
+                <a:ea typeface="BIZ UDPゴシック"/>
+                <a:cs typeface="BIZ UDPゴシック"/>
+              </a:rPr>
               <a:t>2027/3/8</a:t>
             </a:r>
           </a:p>
@@ -10463,7 +10822,11 @@
           <a:bodyPr/>
           <a:p>
             <a:fld id="{B6F15528-21DE-4FAA-801E-634DDDAF4B2B}" type="slidenum">
-              <a:rPr lang="en-US"/>
+              <a:rPr lang="en-US">
+                <a:latin typeface="BIZ UDPゴシック"/>
+                <a:ea typeface="BIZ UDPゴシック"/>
+                <a:cs typeface="BIZ UDPゴシック"/>
+              </a:rPr>
               <a:t>2</a:t>
             </a:fld>
           </a:p>
@@ -10554,6 +10917,9 @@
                 <a:solidFill>
                   <a:srgbClr val="E8457C"/>
                 </a:solidFill>
+                <a:latin typeface="BIZ UDPゴシック"/>
+                <a:ea typeface="BIZ UDPゴシック"/>
+                <a:cs typeface="BIZ UDPゴシック"/>
               </a:rPr>
               <a:t>¥3.8T</a:t>
             </a:r>
@@ -10593,6 +10959,9 @@
                 <a:solidFill>
                   <a:srgbClr val="24303F"/>
                 </a:solidFill>
+                <a:latin typeface="BIZ UDPゴシック"/>
+                <a:ea typeface="BIZ UDPゴシック"/>
+                <a:cs typeface="BIZ UDPゴシック"/>
               </a:rPr>
               <a:t>estimated market for fan activities in Japan (NRI, 2025)</a:t>
             </a:r>
@@ -10684,6 +11053,9 @@
                 <a:solidFill>
                   <a:srgbClr val="0099FF"/>
                 </a:solidFill>
+                <a:latin typeface="BIZ UDPゴシック"/>
+                <a:ea typeface="BIZ UDPゴシック"/>
+                <a:cs typeface="BIZ UDPゴシック"/>
               </a:rPr>
               <a:t>1 in 3</a:t>
             </a:r>
@@ -10723,6 +11095,9 @@
                 <a:solidFill>
                   <a:srgbClr val="24303F"/>
                 </a:solidFill>
+                <a:latin typeface="BIZ UDPゴシック"/>
+                <a:ea typeface="BIZ UDPゴシック"/>
+                <a:cs typeface="BIZ UDPゴシック"/>
               </a:rPr>
               <a:t>people in Japan engage in oshi-katsu</a:t>
             </a:r>
@@ -10814,6 +11189,9 @@
                 <a:solidFill>
                   <a:srgbClr val="12A38A"/>
                 </a:solidFill>
+                <a:latin typeface="BIZ UDPゴシック"/>
+                <a:ea typeface="BIZ UDPゴシック"/>
+                <a:cs typeface="BIZ UDPゴシック"/>
               </a:rPr>
               <a:t>Well-being</a:t>
             </a:r>
@@ -10853,6 +11231,9 @@
                 <a:solidFill>
                   <a:srgbClr val="24303F"/>
                 </a:solidFill>
+                <a:latin typeface="BIZ UDPゴシック"/>
+                <a:ea typeface="BIZ UDPゴシック"/>
+                <a:cs typeface="BIZ UDPゴシック"/>
               </a:rPr>
               <a:t>fan activities can foster purpose and mental health</a:t>
             </a:r>
@@ -10936,6 +11317,9 @@
                 <a:solidFill>
                   <a:srgbClr val="FFFFFF"/>
                 </a:solidFill>
+                <a:latin typeface="BIZ UDPゴシック"/>
+                <a:ea typeface="BIZ UDPゴシック"/>
+                <a:cs typeface="BIZ UDPゴシック"/>
               </a:rPr>
               <a:t>…but also “fandom fatigue”</a:t>
             </a:r>
@@ -10948,7 +11332,7 @@
               <a:buClr>
                 <a:srgbClr val="E8457C"/>
               </a:buClr>
-              <a:buFont typeface="Arial"/>
+              <a:buFont typeface="BIZ UDPゴシック"/>
               <a:buChar char="•"/>
             </a:pPr>
             <a:r>
@@ -10956,6 +11340,9 @@
                 <a:solidFill>
                   <a:srgbClr val="FFFFFF"/>
                 </a:solidFill>
+                <a:latin typeface="BIZ UDPゴシック"/>
+                <a:ea typeface="BIZ UDPゴシック"/>
+                <a:cs typeface="BIZ UDPゴシック"/>
               </a:rPr>
               <a:t>Overspending money and time</a:t>
             </a:r>
@@ -10968,7 +11355,7 @@
               <a:buClr>
                 <a:srgbClr val="E8457C"/>
               </a:buClr>
-              <a:buFont typeface="Arial"/>
+              <a:buFont typeface="BIZ UDPゴシック"/>
               <a:buChar char="•"/>
             </a:pPr>
             <a:r>
@@ -10976,6 +11363,9 @@
                 <a:solidFill>
                   <a:srgbClr val="FFFFFF"/>
                 </a:solidFill>
+                <a:latin typeface="BIZ UDPゴシック"/>
+                <a:ea typeface="BIZ UDPゴシック"/>
+                <a:cs typeface="BIZ UDPゴシック"/>
               </a:rPr>
               <a:t>Comparing yourself with other fans on social media</a:t>
             </a:r>
@@ -10988,7 +11378,7 @@
               <a:buClr>
                 <a:srgbClr val="E8457C"/>
               </a:buClr>
-              <a:buFont typeface="Arial"/>
+              <a:buFont typeface="BIZ UDPゴシック"/>
               <a:buChar char="•"/>
             </a:pPr>
             <a:r>
@@ -10996,6 +11386,9 @@
                 <a:solidFill>
                   <a:srgbClr val="FFFFFF"/>
                 </a:solidFill>
+                <a:latin typeface="BIZ UDPゴシック"/>
+                <a:ea typeface="BIZ UDPゴシック"/>
+                <a:cs typeface="BIZ UDPゴシック"/>
               </a:rPr>
               <a:t>Burnout from a sense of obligation</a:t>
             </a:r>
@@ -11120,6 +11513,9 @@
                 <a:solidFill>
                   <a:srgbClr val="24303F"/>
                 </a:solidFill>
+                <a:latin typeface="BIZ UDPゴシック"/>
+                <a:ea typeface="BIZ UDPゴシック"/>
+                <a:cs typeface="BIZ UDPゴシック"/>
               </a:rPr>
               <a:t>Preliminary survey (N = 215)</a:t>
             </a:r>
@@ -11138,9 +11534,14 @@
         </p:nvSpPr>
         <p:spPr/>
         <p:txBody>
-          <a:bodyPr/>
-          <a:p>
-            <a:r>
+          <a:bodyPr lIns="27432" rIns="0" wrap="none"/>
+          <a:p>
+            <a:r>
+              <a:rPr sz="900">
+                <a:latin typeface="BIZ UDPゴシック"/>
+                <a:ea typeface="BIZ UDPゴシック"/>
+                <a:cs typeface="BIZ UDPゴシック"/>
+              </a:rPr>
               <a:t>2027/3/8</a:t>
             </a:r>
           </a:p>
@@ -11161,7 +11562,11 @@
           <a:bodyPr/>
           <a:p>
             <a:fld id="{B6F15528-21DE-4FAA-801E-634DDDAF4B2B}" type="slidenum">
-              <a:rPr lang="en-US"/>
+              <a:rPr lang="en-US">
+                <a:latin typeface="BIZ UDPゴシック"/>
+                <a:ea typeface="BIZ UDPゴシック"/>
+                <a:cs typeface="BIZ UDPゴシック"/>
+              </a:rPr>
               <a:t>3</a:t>
             </a:fld>
           </a:p>
@@ -11252,8 +11657,11 @@
                 <a:solidFill>
                   <a:srgbClr val="12A38A"/>
                 </a:solidFill>
+                <a:latin typeface="BIZ UDPゴシック"/>
+                <a:ea typeface="BIZ UDPゴシック"/>
+                <a:cs typeface="BIZ UDPゴシック"/>
               </a:rPr>
-              <a:t>~80%</a:t>
+              <a:t>≈80%</a:t>
             </a:r>
           </a:p>
         </p:txBody>
@@ -11291,6 +11699,9 @@
                 <a:solidFill>
                   <a:srgbClr val="24303F"/>
                 </a:solidFill>
+                <a:latin typeface="BIZ UDPゴシック"/>
+                <a:ea typeface="BIZ UDPゴシック"/>
+                <a:cs typeface="BIZ UDPゴシック"/>
               </a:rPr>
               <a:t>oshi = reason to live</a:t>
             </a:r>
@@ -11382,8 +11793,11 @@
                 <a:solidFill>
                   <a:srgbClr val="E07A10"/>
                 </a:solidFill>
+                <a:latin typeface="BIZ UDPゴシック"/>
+                <a:ea typeface="BIZ UDPゴシック"/>
+                <a:cs typeface="BIZ UDPゴシック"/>
               </a:rPr>
-              <a:t>~40%</a:t>
+              <a:t>≈40%</a:t>
             </a:r>
           </a:p>
         </p:txBody>
@@ -11421,6 +11835,9 @@
                 <a:solidFill>
                   <a:srgbClr val="24303F"/>
                 </a:solidFill>
+                <a:latin typeface="BIZ UDPゴシック"/>
+                <a:ea typeface="BIZ UDPゴシック"/>
+                <a:cs typeface="BIZ UDPゴシック"/>
               </a:rPr>
               <a:t>worry about money</a:t>
             </a:r>
@@ -11512,8 +11929,11 @@
                 <a:solidFill>
                   <a:srgbClr val="7C6BC4"/>
                 </a:solidFill>
+                <a:latin typeface="BIZ UDPゴシック"/>
+                <a:ea typeface="BIZ UDPゴシック"/>
+                <a:cs typeface="BIZ UDPゴシック"/>
               </a:rPr>
-              <a:t>~30%</a:t>
+              <a:t>≈30%</a:t>
             </a:r>
           </a:p>
         </p:txBody>
@@ -11551,6 +11971,9 @@
                 <a:solidFill>
                   <a:srgbClr val="24303F"/>
                 </a:solidFill>
+                <a:latin typeface="BIZ UDPゴシック"/>
+                <a:ea typeface="BIZ UDPゴシック"/>
+                <a:cs typeface="BIZ UDPゴシック"/>
               </a:rPr>
               <a:t>lose sleep</a:t>
             </a:r>
@@ -11652,6 +12075,9 @@
                 <a:solidFill>
                   <a:srgbClr val="E07A10"/>
                 </a:solidFill>
+                <a:latin typeface="BIZ UDPゴシック"/>
+                <a:ea typeface="BIZ UDPゴシック"/>
+                <a:cs typeface="BIZ UDPゴシック"/>
               </a:rPr>
               <a:t>27%</a:t>
             </a:r>
@@ -11668,6 +12094,9 @@
                 <a:solidFill>
                   <a:srgbClr val="0B3C6E"/>
                 </a:solidFill>
+                <a:latin typeface="BIZ UDPゴシック"/>
+                <a:ea typeface="BIZ UDPゴシック"/>
+                <a:cs typeface="BIZ UDPゴシック"/>
               </a:rPr>
               <a:t>are high in BOTH fulfilment and fatigue</a:t>
             </a:r>
@@ -11684,6 +12113,9 @@
                 <a:solidFill>
                   <a:srgbClr val="24303F"/>
                 </a:solidFill>
+                <a:latin typeface="BIZ UDPゴシック"/>
+                <a:ea typeface="BIZ UDPゴシック"/>
+                <a:cs typeface="BIZ UDPゴシック"/>
               </a:rPr>
               <a:t>The same activities drive joy and exhaustion</a:t>
             </a:r>
@@ -11754,6 +12186,9 @@
                 <a:solidFill>
                   <a:srgbClr val="24303F"/>
                 </a:solidFill>
+                <a:latin typeface="BIZ UDPゴシック"/>
+                <a:ea typeface="BIZ UDPゴシック"/>
+                <a:cs typeface="BIZ UDPゴシック"/>
               </a:rPr>
               <a:t>The challenge: noisy forecasts</a:t>
             </a:r>
@@ -11772,9 +12207,14 @@
         </p:nvSpPr>
         <p:spPr/>
         <p:txBody>
-          <a:bodyPr/>
-          <a:p>
-            <a:r>
+          <a:bodyPr lIns="27432" rIns="0" wrap="none"/>
+          <a:p>
+            <a:r>
+              <a:rPr sz="900">
+                <a:latin typeface="BIZ UDPゴシック"/>
+                <a:ea typeface="BIZ UDPゴシック"/>
+                <a:cs typeface="BIZ UDPゴシック"/>
+              </a:rPr>
               <a:t>2027/3/8</a:t>
             </a:r>
           </a:p>
@@ -11795,7 +12235,11 @@
           <a:bodyPr/>
           <a:p>
             <a:fld id="{B6F15528-21DE-4FAA-801E-634DDDAF4B2B}" type="slidenum">
-              <a:rPr lang="en-US"/>
+              <a:rPr lang="en-US">
+                <a:latin typeface="BIZ UDPゴシック"/>
+                <a:ea typeface="BIZ UDPゴシック"/>
+                <a:cs typeface="BIZ UDPゴシック"/>
+              </a:rPr>
               <a:t>4</a:t>
             </a:fld>
           </a:p>
@@ -11878,6 +12322,9 @@
                 <a:solidFill>
                   <a:srgbClr val="0B3C6E"/>
                 </a:solidFill>
+                <a:latin typeface="BIZ UDPゴシック"/>
+                <a:ea typeface="BIZ UDPゴシック"/>
+                <a:cs typeface="BIZ UDPゴシック"/>
               </a:rPr>
               <a:t>Our forecast model explains R² = .27 of fulfilment and only R² = .11 of fatigue (±0.92 on a 5-point scale)</a:t>
             </a:r>
@@ -11894,6 +12341,9 @@
                 <a:solidFill>
                   <a:srgbClr val="24303F"/>
                 </a:solidFill>
+                <a:latin typeface="BIZ UDPゴシック"/>
+                <a:ea typeface="BIZ UDPゴシック"/>
+                <a:cs typeface="BIZ UDPゴシック"/>
               </a:rPr>
               <a:t>Showing one confident “future you” would overclaim — and could cause needless anxiety</a:t>
             </a:r>
@@ -12051,6 +12501,9 @@
                 <a:solidFill>
                   <a:srgbClr val="0B3C6E"/>
                 </a:solidFill>
+                <a:latin typeface="BIZ UDPゴシック"/>
+                <a:ea typeface="BIZ UDPゴシック"/>
+                <a:cs typeface="BIZ UDPゴシック"/>
               </a:rPr>
               <a:t>Personalize</a:t>
             </a:r>
@@ -12090,6 +12543,9 @@
                 <a:solidFill>
                   <a:srgbClr val="24303F"/>
                 </a:solidFill>
+                <a:latin typeface="BIZ UDPゴシック"/>
+                <a:ea typeface="BIZ UDPゴシック"/>
+                <a:cs typeface="BIZ UDPゴシック"/>
               </a:rPr>
               <a:t>A Bayesian twin starts from the survey and learns from each person's daily logs</a:t>
             </a:r>
@@ -12247,6 +12703,9 @@
                 <a:solidFill>
                   <a:srgbClr val="0B3C6E"/>
                 </a:solidFill>
+                <a:latin typeface="BIZ UDPゴシック"/>
+                <a:ea typeface="BIZ UDPゴシック"/>
+                <a:cs typeface="BIZ UDPゴシック"/>
               </a:rPr>
               <a:t>Show uncertainty</a:t>
             </a:r>
@@ -12286,6 +12745,9 @@
                 <a:solidFill>
                   <a:srgbClr val="24303F"/>
                 </a:solidFill>
+                <a:latin typeface="BIZ UDPゴシック"/>
+                <a:ea typeface="BIZ UDPゴシック"/>
+                <a:cs typeface="BIZ UDPゴシック"/>
               </a:rPr>
               <a:t>A possible-selves avatar renders the forecast range as overlapping selves</a:t>
             </a:r>
@@ -12443,6 +12905,9 @@
                 <a:solidFill>
                   <a:srgbClr val="0B3C6E"/>
                 </a:solidFill>
+                <a:latin typeface="BIZ UDPゴシック"/>
+                <a:ea typeface="BIZ UDPゴシック"/>
+                <a:cs typeface="BIZ UDPゴシック"/>
               </a:rPr>
               <a:t>Rebalance, not restrict</a:t>
             </a:r>
@@ -12482,6 +12947,9 @@
                 <a:solidFill>
                   <a:srgbClr val="24303F"/>
                 </a:solidFill>
+                <a:latin typeface="BIZ UDPゴシック"/>
+                <a:ea typeface="BIZ UDPゴシック"/>
+                <a:cs typeface="BIZ UDPゴシック"/>
               </a:rPr>
               <a:t>Proposals re-allocate activities and never cut what people want more of</a:t>
             </a:r>
@@ -12543,6 +13011,9 @@
                 <a:solidFill>
                   <a:srgbClr val="FFFFFF"/>
                 </a:solidFill>
+                <a:latin typeface="BIZ UDPゴシック"/>
+                <a:ea typeface="BIZ UDPゴシック"/>
+                <a:cs typeface="BIZ UDPゴシック"/>
               </a:rPr>
               <a:t>Goal: support behavior change without overclaiming — and without taking the joy away</a:t>
             </a:r>
@@ -12595,6 +13066,9 @@
                 <a:solidFill>
                   <a:srgbClr val="24303F"/>
                 </a:solidFill>
+                <a:latin typeface="BIZ UDPゴシック"/>
+                <a:ea typeface="BIZ UDPゴシック"/>
+                <a:cs typeface="BIZ UDPゴシック"/>
               </a:rPr>
               <a:t>OshiFit at a glance</a:t>
             </a:r>
@@ -12613,9 +13087,14 @@
         </p:nvSpPr>
         <p:spPr/>
         <p:txBody>
-          <a:bodyPr/>
-          <a:p>
-            <a:r>
+          <a:bodyPr lIns="27432" rIns="0" wrap="none"/>
+          <a:p>
+            <a:r>
+              <a:rPr sz="900">
+                <a:latin typeface="BIZ UDPゴシック"/>
+                <a:ea typeface="BIZ UDPゴシック"/>
+                <a:cs typeface="BIZ UDPゴシック"/>
+              </a:rPr>
               <a:t>2027/3/8</a:t>
             </a:r>
           </a:p>
@@ -12636,7 +13115,11 @@
           <a:bodyPr/>
           <a:p>
             <a:fld id="{B6F15528-21DE-4FAA-801E-634DDDAF4B2B}" type="slidenum">
-              <a:rPr lang="en-US"/>
+              <a:rPr lang="en-US">
+                <a:latin typeface="BIZ UDPゴシック"/>
+                <a:ea typeface="BIZ UDPゴシック"/>
+                <a:cs typeface="BIZ UDPゴシック"/>
+              </a:rPr>
               <a:t>5</a:t>
             </a:fld>
           </a:p>
@@ -12793,6 +13276,9 @@
                 <a:solidFill>
                   <a:srgbClr val="0B3C6E"/>
                 </a:solidFill>
+                <a:latin typeface="BIZ UDPゴシック"/>
+                <a:ea typeface="BIZ UDPゴシック"/>
+                <a:cs typeface="BIZ UDPゴシック"/>
               </a:rPr>
               <a:t>TIPI-J</a:t>
             </a:r>
@@ -12809,6 +13295,9 @@
                 <a:solidFill>
                   <a:srgbClr val="5A6676"/>
                 </a:solidFill>
+                <a:latin typeface="BIZ UDPゴシック"/>
+                <a:ea typeface="BIZ UDPゴシック"/>
+                <a:cs typeface="BIZ UDPゴシック"/>
               </a:rPr>
               <a:t>once, 1 min</a:t>
             </a:r>
@@ -12966,6 +13455,9 @@
                 <a:solidFill>
                   <a:srgbClr val="0B3C6E"/>
                 </a:solidFill>
+                <a:latin typeface="BIZ UDPゴシック"/>
+                <a:ea typeface="BIZ UDPゴシック"/>
+                <a:cs typeface="BIZ UDPゴシック"/>
               </a:rPr>
               <a:t>Daily log</a:t>
             </a:r>
@@ -12982,8 +13474,11 @@
                 <a:solidFill>
                   <a:srgbClr val="5A6676"/>
                 </a:solidFill>
+                <a:latin typeface="BIZ UDPゴシック"/>
+                <a:ea typeface="BIZ UDPゴシック"/>
+                <a:cs typeface="BIZ UDPゴシック"/>
               </a:rPr>
-              <a:t>~30 s a day</a:t>
+              <a:t>≈30 s a day</a:t>
             </a:r>
           </a:p>
         </p:txBody>
@@ -13139,6 +13634,9 @@
                 <a:solidFill>
                   <a:srgbClr val="0B3C6E"/>
                 </a:solidFill>
+                <a:latin typeface="BIZ UDPゴシック"/>
+                <a:ea typeface="BIZ UDPゴシック"/>
+                <a:cs typeface="BIZ UDPゴシック"/>
               </a:rPr>
               <a:t>Wishes</a:t>
             </a:r>
@@ -13155,6 +13653,9 @@
                 <a:solidFill>
                   <a:srgbClr val="5A6676"/>
                 </a:solidFill>
+                <a:latin typeface="BIZ UDPゴシック"/>
+                <a:ea typeface="BIZ UDPゴシック"/>
+                <a:cs typeface="BIZ UDPゴシック"/>
               </a:rPr>
               <a:t>more / less of what</a:t>
             </a:r>
@@ -13244,6 +13745,9 @@
                 <a:solidFill>
                   <a:srgbClr val="FFFFFF"/>
                 </a:solidFill>
+                <a:latin typeface="BIZ UDPゴシック"/>
+                <a:ea typeface="BIZ UDPゴシック"/>
+                <a:cs typeface="BIZ UDPゴシック"/>
               </a:rPr>
               <a:t>①</a:t>
             </a:r>
@@ -13283,6 +13787,9 @@
                 <a:solidFill>
                   <a:srgbClr val="FFFFFF"/>
                 </a:solidFill>
+                <a:latin typeface="BIZ UDPゴシック"/>
+                <a:ea typeface="BIZ UDPゴシック"/>
+                <a:cs typeface="BIZ UDPゴシック"/>
               </a:rPr>
               <a:t>Bayesian Twin</a:t>
             </a:r>
@@ -13322,6 +13829,9 @@
                 <a:solidFill>
                   <a:srgbClr val="FFFFFF"/>
                 </a:solidFill>
+                <a:latin typeface="BIZ UDPゴシック"/>
+                <a:ea typeface="BIZ UDPゴシック"/>
+                <a:cs typeface="BIZ UDPゴシック"/>
               </a:rPr>
               <a:t>Personal model,</a:t>
             </a:r>
@@ -13338,6 +13848,9 @@
                 <a:solidFill>
                   <a:srgbClr val="FFFFFF"/>
                 </a:solidFill>
+                <a:latin typeface="BIZ UDPゴシック"/>
+                <a:ea typeface="BIZ UDPゴシック"/>
+                <a:cs typeface="BIZ UDPゴシック"/>
               </a:rPr>
               <a:t>updated nightly</a:t>
             </a:r>
@@ -13427,6 +13940,9 @@
                 <a:solidFill>
                   <a:srgbClr val="FFFFFF"/>
                 </a:solidFill>
+                <a:latin typeface="BIZ UDPゴシック"/>
+                <a:ea typeface="BIZ UDPゴシック"/>
+                <a:cs typeface="BIZ UDPゴシック"/>
               </a:rPr>
               <a:t>②</a:t>
             </a:r>
@@ -13466,6 +13982,9 @@
                 <a:solidFill>
                   <a:srgbClr val="FFFFFF"/>
                 </a:solidFill>
+                <a:latin typeface="BIZ UDPゴシック"/>
+                <a:ea typeface="BIZ UDPゴシック"/>
+                <a:cs typeface="BIZ UDPゴシック"/>
               </a:rPr>
               <a:t>Rebalance Engine</a:t>
             </a:r>
@@ -13505,6 +14024,9 @@
                 <a:solidFill>
                   <a:srgbClr val="FFFFFF"/>
                 </a:solidFill>
+                <a:latin typeface="BIZ UDPゴシック"/>
+                <a:ea typeface="BIZ UDPゴシック"/>
+                <a:cs typeface="BIZ UDPゴシック"/>
               </a:rPr>
               <a:t>Re-allocate, not restrict:</a:t>
             </a:r>
@@ -13521,6 +14043,9 @@
                 <a:solidFill>
                   <a:srgbClr val="FFFFFF"/>
                 </a:solidFill>
+                <a:latin typeface="BIZ UDPゴシック"/>
+                <a:ea typeface="BIZ UDPゴシック"/>
+                <a:cs typeface="BIZ UDPゴシック"/>
               </a:rPr>
               <a:t>3 Pareto options</a:t>
             </a:r>
@@ -13732,6 +14257,9 @@
                 <a:solidFill>
                   <a:srgbClr val="12A38A"/>
                 </a:solidFill>
+                <a:latin typeface="BIZ UDPゴシック"/>
+                <a:ea typeface="BIZ UDPゴシック"/>
+                <a:cs typeface="BIZ UDPゴシック"/>
               </a:rPr>
               <a:t>③④ Future Mirror</a:t>
             </a:r>
@@ -13819,6 +14347,9 @@
                 <a:solidFill>
                   <a:srgbClr val="E07A10"/>
                 </a:solidFill>
+                <a:latin typeface="BIZ UDPゴシック"/>
+                <a:ea typeface="BIZ UDPゴシック"/>
+                <a:cs typeface="BIZ UDPゴシック"/>
               </a:rPr>
               <a:t>As is</a:t>
             </a:r>
@@ -13858,6 +14389,9 @@
                 <a:solidFill>
                   <a:srgbClr val="12A38A"/>
                 </a:solidFill>
+                <a:latin typeface="BIZ UDPゴシック"/>
+                <a:ea typeface="BIZ UDPゴシック"/>
+                <a:cs typeface="BIZ UDPゴシック"/>
               </a:rPr>
               <a:t>Proposal</a:t>
             </a:r>
@@ -13897,6 +14431,9 @@
                 <a:solidFill>
                   <a:srgbClr val="0B3C6E"/>
                 </a:solidFill>
+                <a:latin typeface="BIZ UDPゴシック"/>
+                <a:ea typeface="BIZ UDPゴシック"/>
+                <a:cs typeface="BIZ UDPゴシック"/>
               </a:rPr>
               <a:t>Possible-selves avatar</a:t>
             </a:r>
@@ -13913,6 +14450,9 @@
                 <a:solidFill>
                   <a:srgbClr val="24303F"/>
                 </a:solidFill>
+                <a:latin typeface="BIZ UDPゴシック"/>
+                <a:ea typeface="BIZ UDPゴシック"/>
+                <a:cs typeface="BIZ UDPゴシック"/>
               </a:rPr>
               <a:t>range shown as overlap</a:t>
             </a:r>
@@ -13929,6 +14469,9 @@
                 <a:solidFill>
                   <a:srgbClr val="0B3C6E"/>
                 </a:solidFill>
+                <a:latin typeface="BIZ UDPゴシック"/>
+                <a:ea typeface="BIZ UDPゴシック"/>
+                <a:cs typeface="BIZ UDPゴシック"/>
               </a:rPr>
               <a:t>Fatigue-facet cues</a:t>
             </a:r>
@@ -13945,6 +14488,9 @@
                 <a:solidFill>
                   <a:srgbClr val="24303F"/>
                 </a:solidFill>
+                <a:latin typeface="BIZ UDPゴシック"/>
+                <a:ea typeface="BIZ UDPゴシック"/>
+                <a:cs typeface="BIZ UDPゴシック"/>
               </a:rPr>
               <a:t>sleep, money, duty, compare</a:t>
             </a:r>
@@ -14006,8 +14552,11 @@
                 <a:solidFill>
                   <a:srgbClr val="0B3C6E"/>
                 </a:solidFill>
+                <a:latin typeface="BIZ UDPゴシック"/>
+                <a:ea typeface="BIZ UDPゴシック"/>
+                <a:cs typeface="BIZ UDPゴシック"/>
               </a:rPr>
-              <a:t>Choose → try a week → check-in → log → nightly update → forecast check</a:t>
+              <a:t>Choose → try a week → check-in → log → update → check forecast</a:t>
             </a:r>
           </a:p>
         </p:txBody>
@@ -14123,12 +14672,12 @@
           </a:fontRef>
         </p:style>
         <p:txBody>
-          <a:bodyPr rtlCol="0" anchor="ctr" wrap="square" lIns="45720" tIns="27432" rIns="45720" bIns="27432">
+          <a:bodyPr rtlCol="0" anchor="ctr" wrap="square" lIns="566928" tIns="27432" bIns="27432">
             <a:noAutofit/>
           </a:bodyPr>
           <a:lstStyle/>
           <a:p>
-            <a:pPr algn="ctr" marL="0" indent="0">
+            <a:pPr algn="l" marL="0" indent="0">
               <a:spcAft>
                 <a:spcPts val="400"/>
               </a:spcAft>
@@ -14139,6 +14688,9 @@
                 <a:solidFill>
                   <a:srgbClr val="E8457C"/>
                 </a:solidFill>
+                <a:latin typeface="BIZ UDPゴシック"/>
+                <a:ea typeface="BIZ UDPゴシック"/>
+                <a:cs typeface="BIZ UDPゴシック"/>
               </a:rPr>
               <a:t>Safety layer: when logs signal strong distress, forecasts pause and help resources are shown</a:t>
             </a:r>
@@ -14257,6 +14809,9 @@
                 <a:solidFill>
                   <a:srgbClr val="24303F"/>
                 </a:solidFill>
+                <a:latin typeface="BIZ UDPゴシック"/>
+                <a:ea typeface="BIZ UDPゴシック"/>
+                <a:cs typeface="BIZ UDPゴシック"/>
               </a:rPr>
               <a:t>Possible-selves avatar</a:t>
             </a:r>
@@ -14275,9 +14830,14 @@
         </p:nvSpPr>
         <p:spPr/>
         <p:txBody>
-          <a:bodyPr/>
-          <a:p>
-            <a:r>
+          <a:bodyPr lIns="27432" rIns="0" wrap="none"/>
+          <a:p>
+            <a:r>
+              <a:rPr sz="900">
+                <a:latin typeface="BIZ UDPゴシック"/>
+                <a:ea typeface="BIZ UDPゴシック"/>
+                <a:cs typeface="BIZ UDPゴシック"/>
+              </a:rPr>
               <a:t>2027/3/8</a:t>
             </a:r>
           </a:p>
@@ -14298,7 +14858,11 @@
           <a:bodyPr/>
           <a:p>
             <a:fld id="{B6F15528-21DE-4FAA-801E-634DDDAF4B2B}" type="slidenum">
-              <a:rPr lang="en-US"/>
+              <a:rPr lang="en-US">
+                <a:latin typeface="BIZ UDPゴシック"/>
+                <a:ea typeface="BIZ UDPゴシック"/>
+                <a:cs typeface="BIZ UDPゴシック"/>
+              </a:rPr>
               <a:t>6</a:t>
             </a:fld>
           </a:p>
@@ -14405,6 +14969,9 @@
                 <a:solidFill>
                   <a:srgbClr val="0B3C6E"/>
                 </a:solidFill>
+                <a:latin typeface="BIZ UDPゴシック"/>
+                <a:ea typeface="BIZ UDPゴシック"/>
+                <a:cs typeface="BIZ UDPゴシック"/>
               </a:rPr>
               <a:t>Day 0</a:t>
             </a:r>
@@ -14444,6 +15011,9 @@
                 <a:solidFill>
                   <a:srgbClr val="5A6676"/>
                 </a:solidFill>
+                <a:latin typeface="BIZ UDPゴシック"/>
+                <a:ea typeface="BIZ UDPゴシック"/>
+                <a:cs typeface="BIZ UDPゴシック"/>
               </a:rPr>
               <a:t>a blurry future</a:t>
             </a:r>
@@ -14551,6 +15121,9 @@
                 <a:solidFill>
                   <a:srgbClr val="0B3C6E"/>
                 </a:solidFill>
+                <a:latin typeface="BIZ UDPゴシック"/>
+                <a:ea typeface="BIZ UDPゴシック"/>
+                <a:cs typeface="BIZ UDPゴシック"/>
               </a:rPr>
               <a:t>Day 7</a:t>
             </a:r>
@@ -14590,6 +15163,9 @@
                 <a:solidFill>
                   <a:srgbClr val="5A6676"/>
                 </a:solidFill>
+                <a:latin typeface="BIZ UDPゴシック"/>
+                <a:ea typeface="BIZ UDPゴシック"/>
+                <a:cs typeface="BIZ UDPゴシック"/>
               </a:rPr>
               <a:t>selves converge</a:t>
             </a:r>
@@ -14697,6 +15273,9 @@
                 <a:solidFill>
                   <a:srgbClr val="12A38A"/>
                 </a:solidFill>
+                <a:latin typeface="BIZ UDPゴシック"/>
+                <a:ea typeface="BIZ UDPゴシック"/>
+                <a:cs typeface="BIZ UDPゴシック"/>
               </a:rPr>
               <a:t>Day 14</a:t>
             </a:r>
@@ -14736,6 +15315,9 @@
                 <a:solidFill>
                   <a:srgbClr val="5A6676"/>
                 </a:solidFill>
+                <a:latin typeface="BIZ UDPゴシック"/>
+                <a:ea typeface="BIZ UDPゴシック"/>
+                <a:cs typeface="BIZ UDPゴシック"/>
               </a:rPr>
               <a:t>a sharper you</a:t>
             </a:r>
@@ -14893,6 +15475,9 @@
                 <a:solidFill>
                   <a:srgbClr val="0B3C6E"/>
                 </a:solidFill>
+                <a:latin typeface="BIZ UDPゴシック"/>
+                <a:ea typeface="BIZ UDPゴシック"/>
+                <a:cs typeface="BIZ UDPゴシック"/>
               </a:rPr>
               <a:t>How</a:t>
             </a:r>
@@ -14932,6 +15517,9 @@
                 <a:solidFill>
                   <a:srgbClr val="24303F"/>
                 </a:solidFill>
+                <a:latin typeface="BIZ UDPゴシック"/>
+                <a:ea typeface="BIZ UDPゴシック"/>
+                <a:cs typeface="BIZ UDPゴシック"/>
               </a:rPr>
               <a:t>Draw 20 futures from the posterior, bin them into 3 states, overlay 5 selves. Opacity = likelihood</a:t>
             </a:r>
@@ -15089,6 +15677,9 @@
                 <a:solidFill>
                   <a:srgbClr val="0B3C6E"/>
                 </a:solidFill>
+                <a:latin typeface="BIZ UDPゴシック"/>
+                <a:ea typeface="BIZ UDPゴシック"/>
+                <a:cs typeface="BIZ UDPゴシック"/>
               </a:rPr>
               <a:t>Why</a:t>
             </a:r>
@@ -15128,6 +15719,9 @@
                 <a:solidFill>
                   <a:srgbClr val="24303F"/>
                 </a:solidFill>
+                <a:latin typeface="BIZ UDPゴシック"/>
+                <a:ea typeface="BIZ UDPゴシック"/>
+                <a:cs typeface="BIZ UDPゴシック"/>
               </a:rPr>
               <a:t>Uncertainty becomes visible, and “future-self resolution” rewards continued logging</a:t>
             </a:r>
@@ -15285,6 +15879,9 @@
                 <a:solidFill>
                   <a:srgbClr val="0B3C6E"/>
                 </a:solidFill>
+                <a:latin typeface="BIZ UDPゴシック"/>
+                <a:ea typeface="BIZ UDPゴシック"/>
+                <a:cs typeface="BIZ UDPゴシック"/>
               </a:rPr>
               <a:t>Grounded in</a:t>
             </a:r>
@@ -15324,6 +15921,9 @@
                 <a:solidFill>
                   <a:srgbClr val="24303F"/>
                 </a:solidFill>
+                <a:latin typeface="BIZ UDPゴシック"/>
+                <a:ea typeface="BIZ UDPゴシック"/>
+                <a:cs typeface="BIZ UDPゴシック"/>
               </a:rPr>
               <a:t>Proteus effect, future-self renderings (Hershfield et al., 2011), quantile dotplots (Kay et al., 2016)</a:t>
             </a:r>
@@ -15376,6 +15976,9 @@
                 <a:solidFill>
                   <a:srgbClr val="24303F"/>
                 </a:solidFill>
+                <a:latin typeface="BIZ UDPゴシック"/>
+                <a:ea typeface="BIZ UDPゴシック"/>
+                <a:cs typeface="BIZ UDPゴシック"/>
               </a:rPr>
               <a:t>Rebalance, not restrict</a:t>
             </a:r>
@@ -15394,9 +15997,14 @@
         </p:nvSpPr>
         <p:spPr/>
         <p:txBody>
-          <a:bodyPr/>
-          <a:p>
-            <a:r>
+          <a:bodyPr lIns="27432" rIns="0" wrap="none"/>
+          <a:p>
+            <a:r>
+              <a:rPr sz="900">
+                <a:latin typeface="BIZ UDPゴシック"/>
+                <a:ea typeface="BIZ UDPゴシック"/>
+                <a:cs typeface="BIZ UDPゴシック"/>
+              </a:rPr>
               <a:t>2027/3/8</a:t>
             </a:r>
           </a:p>
@@ -15417,7 +16025,11 @@
           <a:bodyPr/>
           <a:p>
             <a:fld id="{B6F15528-21DE-4FAA-801E-634DDDAF4B2B}" type="slidenum">
-              <a:rPr lang="en-US"/>
+              <a:rPr lang="en-US">
+                <a:latin typeface="BIZ UDPゴシック"/>
+                <a:ea typeface="BIZ UDPゴシック"/>
+                <a:cs typeface="BIZ UDPゴシック"/>
+              </a:rPr>
               <a:t>7</a:t>
             </a:fld>
           </a:p>
@@ -15592,6 +16204,9 @@
                 <a:solidFill>
                   <a:srgbClr val="0B3C6E"/>
                 </a:solidFill>
+                <a:latin typeface="BIZ UDPゴシック"/>
+                <a:ea typeface="BIZ UDPゴシック"/>
+                <a:cs typeface="BIZ UDPゴシック"/>
               </a:rPr>
               <a:t>How options are made</a:t>
             </a:r>
@@ -15627,7 +16242,7 @@
               <a:buClr>
                 <a:srgbClr val="0099FF"/>
               </a:buClr>
-              <a:buFont typeface="Arial"/>
+              <a:buFont typeface="BIZ UDPゴシック"/>
               <a:buChar char="•"/>
             </a:pPr>
             <a:r>
@@ -15635,6 +16250,9 @@
                 <a:solidFill>
                   <a:srgbClr val="24303F"/>
                 </a:solidFill>
+                <a:latin typeface="BIZ UDPゴシック"/>
+                <a:ea typeface="BIZ UDPゴシック"/>
+                <a:cs typeface="BIZ UDPゴシック"/>
               </a:rPr>
               <a:t>98 candidates: change up to 2 of 7 activities by one step</a:t>
             </a:r>
@@ -15647,7 +16265,7 @@
               <a:buClr>
                 <a:srgbClr val="0099FF"/>
               </a:buClr>
-              <a:buFont typeface="Arial"/>
+              <a:buFont typeface="BIZ UDPゴシック"/>
               <a:buChar char="•"/>
             </a:pPr>
             <a:r>
@@ -15655,6 +16273,9 @@
                 <a:solidFill>
                   <a:srgbClr val="24303F"/>
                 </a:solidFill>
+                <a:latin typeface="BIZ UDPゴシック"/>
+                <a:ea typeface="BIZ UDPゴシック"/>
+                <a:cs typeface="BIZ UDPゴシック"/>
               </a:rPr>
               <a:t>Drop options that cut what the user wants more of</a:t>
             </a:r>
@@ -15667,7 +16288,7 @@
               <a:buClr>
                 <a:srgbClr val="0099FF"/>
               </a:buClr>
-              <a:buFont typeface="Arial"/>
+              <a:buFont typeface="BIZ UDPゴシック"/>
               <a:buChar char="•"/>
             </a:pPr>
             <a:r>
@@ -15675,6 +16296,9 @@
                 <a:solidFill>
                   <a:srgbClr val="24303F"/>
                 </a:solidFill>
+                <a:latin typeface="BIZ UDPゴシック"/>
+                <a:ea typeface="BIZ UDPゴシック"/>
+                <a:cs typeface="BIZ UDPゴシック"/>
               </a:rPr>
               <a:t>Keep the Pareto front; show 3 options</a:t>
             </a:r>
@@ -15758,6 +16382,9 @@
                 <a:solidFill>
                   <a:srgbClr val="12A38A"/>
                 </a:solidFill>
+                <a:latin typeface="BIZ UDPゴシック"/>
+                <a:ea typeface="BIZ UDPゴシック"/>
+                <a:cs typeface="BIZ UDPゴシック"/>
               </a:rPr>
               <a:t>The user chooses</a:t>
             </a:r>
@@ -15774,6 +16401,9 @@
                 <a:solidFill>
                   <a:srgbClr val="24303F"/>
                 </a:solidFill>
+                <a:latin typeface="BIZ UDPゴシック"/>
+                <a:ea typeface="BIZ UDPゴシック"/>
+                <a:cs typeface="BIZ UDPゴシック"/>
               </a:rPr>
               <a:t>…or skips the week. Autonomy is part of the design</a:t>
             </a:r>
@@ -15837,6 +16467,9 @@
                 <a:solidFill>
                   <a:srgbClr val="E8457C"/>
                 </a:solidFill>
+                <a:latin typeface="BIZ UDPゴシック"/>
+                <a:ea typeface="BIZ UDPゴシック"/>
+                <a:cs typeface="BIZ UDPゴシック"/>
               </a:rPr>
               <a:t>※ 予測値は例示 (example values)</a:t>
             </a:r>
@@ -15889,6 +16522,9 @@
                 <a:solidFill>
                   <a:srgbClr val="24303F"/>
                 </a:solidFill>
+                <a:latin typeface="BIZ UDPゴシック"/>
+                <a:ea typeface="BIZ UDPゴシック"/>
+                <a:cs typeface="BIZ UDPゴシック"/>
               </a:rPr>
               <a:t>A week with OshiFit</a:t>
             </a:r>
@@ -15907,9 +16543,14 @@
         </p:nvSpPr>
         <p:spPr/>
         <p:txBody>
-          <a:bodyPr/>
-          <a:p>
-            <a:r>
+          <a:bodyPr lIns="27432" rIns="0" wrap="none"/>
+          <a:p>
+            <a:r>
+              <a:rPr sz="900">
+                <a:latin typeface="BIZ UDPゴシック"/>
+                <a:ea typeface="BIZ UDPゴシック"/>
+                <a:cs typeface="BIZ UDPゴシック"/>
+              </a:rPr>
               <a:t>2027/3/8</a:t>
             </a:r>
           </a:p>
@@ -15930,7 +16571,11 @@
           <a:bodyPr/>
           <a:p>
             <a:fld id="{B6F15528-21DE-4FAA-801E-634DDDAF4B2B}" type="slidenum">
-              <a:rPr lang="en-US"/>
+              <a:rPr lang="en-US">
+                <a:latin typeface="BIZ UDPゴシック"/>
+                <a:ea typeface="BIZ UDPゴシック"/>
+                <a:cs typeface="BIZ UDPゴシック"/>
+              </a:rPr>
               <a:t>8</a:t>
             </a:fld>
           </a:p>
@@ -15991,6 +16636,9 @@
                 <a:solidFill>
                   <a:srgbClr val="FFFFFF"/>
                 </a:solidFill>
+                <a:latin typeface="BIZ UDPゴシック"/>
+                <a:ea typeface="BIZ UDPゴシック"/>
+                <a:cs typeface="BIZ UDPゴシック"/>
               </a:rPr>
               <a:t>Every day</a:t>
             </a:r>
@@ -16054,8 +16702,11 @@
                 <a:solidFill>
                   <a:srgbClr val="0B3C6E"/>
                 </a:solidFill>
+                <a:latin typeface="BIZ UDPゴシック"/>
+                <a:ea typeface="BIZ UDPゴシック"/>
+                <a:cs typeface="BIZ UDPゴシック"/>
               </a:rPr>
-              <a:t>Log in ~30 s</a:t>
+              <a:t>Log in ≈30 s</a:t>
             </a:r>
           </a:p>
         </p:txBody>
@@ -16157,6 +16808,9 @@
                 <a:solidFill>
                   <a:srgbClr val="FFFFFF"/>
                 </a:solidFill>
+                <a:latin typeface="BIZ UDPゴシック"/>
+                <a:ea typeface="BIZ UDPゴシック"/>
+                <a:cs typeface="BIZ UDPゴシック"/>
               </a:rPr>
               <a:t>Weekly</a:t>
             </a:r>
@@ -16220,6 +16874,9 @@
                 <a:solidFill>
                   <a:srgbClr val="0B3C6E"/>
                 </a:solidFill>
+                <a:latin typeface="BIZ UDPゴシック"/>
+                <a:ea typeface="BIZ UDPゴシック"/>
+                <a:cs typeface="BIZ UDPゴシック"/>
               </a:rPr>
               <a:t>Pick a proposal</a:t>
             </a:r>
@@ -16323,6 +16980,9 @@
                 <a:solidFill>
                   <a:srgbClr val="FFFFFF"/>
                 </a:solidFill>
+                <a:latin typeface="BIZ UDPゴシック"/>
+                <a:ea typeface="BIZ UDPゴシック"/>
+                <a:cs typeface="BIZ UDPゴシック"/>
               </a:rPr>
               <a:t>Weekly (Group C)</a:t>
             </a:r>
@@ -16386,6 +17046,9 @@
                 <a:solidFill>
                   <a:srgbClr val="0B3C6E"/>
                 </a:solidFill>
+                <a:latin typeface="BIZ UDPゴシック"/>
+                <a:ea typeface="BIZ UDPゴシック"/>
+                <a:cs typeface="BIZ UDPゴシック"/>
               </a:rPr>
               <a:t>Compare futures</a:t>
             </a:r>
@@ -16438,6 +17101,9 @@
                 <a:solidFill>
                   <a:srgbClr val="24303F"/>
                 </a:solidFill>
+                <a:latin typeface="BIZ UDPゴシック"/>
+                <a:ea typeface="BIZ UDPゴシック"/>
+                <a:cs typeface="BIZ UDPゴシック"/>
               </a:rPr>
               <a:t>Study: 6-week, three-arm RCT</a:t>
             </a:r>
@@ -16456,9 +17122,14 @@
         </p:nvSpPr>
         <p:spPr/>
         <p:txBody>
-          <a:bodyPr/>
-          <a:p>
-            <a:r>
+          <a:bodyPr lIns="27432" rIns="0" wrap="none"/>
+          <a:p>
+            <a:r>
+              <a:rPr sz="900">
+                <a:latin typeface="BIZ UDPゴシック"/>
+                <a:ea typeface="BIZ UDPゴシック"/>
+                <a:cs typeface="BIZ UDPゴシック"/>
+              </a:rPr>
               <a:t>2027/3/8</a:t>
             </a:r>
           </a:p>
@@ -16479,7 +17150,11 @@
           <a:bodyPr/>
           <a:p>
             <a:fld id="{B6F15528-21DE-4FAA-801E-634DDDAF4B2B}" type="slidenum">
-              <a:rPr lang="en-US"/>
+              <a:rPr lang="en-US">
+                <a:latin typeface="BIZ UDPゴシック"/>
+                <a:ea typeface="BIZ UDPゴシック"/>
+                <a:cs typeface="BIZ UDPゴシック"/>
+              </a:rPr>
               <a:t>9</a:t>
             </a:fld>
           </a:p>
@@ -16518,6 +17193,9 @@
                 <a:solidFill>
                   <a:srgbClr val="5A6676"/>
                 </a:solidFill>
+                <a:latin typeface="BIZ UDPゴシック"/>
+                <a:ea typeface="BIZ UDPゴシック"/>
+                <a:cs typeface="BIZ UDPゴシック"/>
               </a:rPr>
               <a:t>Week 1</a:t>
             </a:r>
@@ -16557,6 +17235,9 @@
                 <a:solidFill>
                   <a:srgbClr val="5A6676"/>
                 </a:solidFill>
+                <a:latin typeface="BIZ UDPゴシック"/>
+                <a:ea typeface="BIZ UDPゴシック"/>
+                <a:cs typeface="BIZ UDPゴシック"/>
               </a:rPr>
               <a:t>Week 2</a:t>
             </a:r>
@@ -16596,6 +17277,9 @@
                 <a:solidFill>
                   <a:srgbClr val="5A6676"/>
                 </a:solidFill>
+                <a:latin typeface="BIZ UDPゴシック"/>
+                <a:ea typeface="BIZ UDPゴシック"/>
+                <a:cs typeface="BIZ UDPゴシック"/>
               </a:rPr>
               <a:t>Week 3</a:t>
             </a:r>
@@ -16635,6 +17319,9 @@
                 <a:solidFill>
                   <a:srgbClr val="5A6676"/>
                 </a:solidFill>
+                <a:latin typeface="BIZ UDPゴシック"/>
+                <a:ea typeface="BIZ UDPゴシック"/>
+                <a:cs typeface="BIZ UDPゴシック"/>
               </a:rPr>
               <a:t>Week 4</a:t>
             </a:r>
@@ -16674,6 +17361,9 @@
                 <a:solidFill>
                   <a:srgbClr val="5A6676"/>
                 </a:solidFill>
+                <a:latin typeface="BIZ UDPゴシック"/>
+                <a:ea typeface="BIZ UDPゴシック"/>
+                <a:cs typeface="BIZ UDPゴシック"/>
               </a:rPr>
               <a:t>Week 5</a:t>
             </a:r>
@@ -16713,6 +17403,9 @@
                 <a:solidFill>
                   <a:srgbClr val="5A6676"/>
                 </a:solidFill>
+                <a:latin typeface="BIZ UDPゴシック"/>
+                <a:ea typeface="BIZ UDPゴシック"/>
+                <a:cs typeface="BIZ UDPゴシック"/>
               </a:rPr>
               <a:t>Week 6</a:t>
             </a:r>
@@ -16752,6 +17445,9 @@
                 <a:solidFill>
                   <a:srgbClr val="7A8594"/>
                 </a:solidFill>
+                <a:latin typeface="BIZ UDPゴシック"/>
+                <a:ea typeface="BIZ UDPゴシック"/>
+                <a:cs typeface="BIZ UDPゴシック"/>
               </a:rPr>
               <a:t>A: Log only</a:t>
             </a:r>
@@ -16813,6 +17509,9 @@
                 <a:solidFill>
                   <a:srgbClr val="5A6676"/>
                 </a:solidFill>
+                <a:latin typeface="BIZ UDPゴシック"/>
+                <a:ea typeface="BIZ UDPゴシック"/>
+                <a:cs typeface="BIZ UDPゴシック"/>
               </a:rPr>
               <a:t>Log only</a:t>
             </a:r>
@@ -16876,6 +17575,9 @@
                 <a:solidFill>
                   <a:srgbClr val="0B3C6E"/>
                 </a:solidFill>
+                <a:latin typeface="BIZ UDPゴシック"/>
+                <a:ea typeface="BIZ UDPゴシック"/>
+                <a:cs typeface="BIZ UDPゴシック"/>
               </a:rPr>
               <a:t>Log only</a:t>
             </a:r>
@@ -16915,6 +17617,9 @@
                 <a:solidFill>
                   <a:srgbClr val="0099FF"/>
                 </a:solidFill>
+                <a:latin typeface="BIZ UDPゴシック"/>
+                <a:ea typeface="BIZ UDPゴシック"/>
+                <a:cs typeface="BIZ UDPゴシック"/>
               </a:rPr>
               <a:t>B: Text proposals</a:t>
             </a:r>
@@ -16976,6 +17681,9 @@
                 <a:solidFill>
                   <a:srgbClr val="5A6676"/>
                 </a:solidFill>
+                <a:latin typeface="BIZ UDPゴシック"/>
+                <a:ea typeface="BIZ UDPゴシック"/>
+                <a:cs typeface="BIZ UDPゴシック"/>
               </a:rPr>
               <a:t>Log only</a:t>
             </a:r>
@@ -17039,6 +17747,9 @@
                 <a:solidFill>
                   <a:srgbClr val="0B3C6E"/>
                 </a:solidFill>
+                <a:latin typeface="BIZ UDPゴシック"/>
+                <a:ea typeface="BIZ UDPゴシック"/>
+                <a:cs typeface="BIZ UDPゴシック"/>
               </a:rPr>
               <a:t>Proposals (text) + log</a:t>
             </a:r>
@@ -17078,6 +17789,9 @@
                 <a:solidFill>
                   <a:srgbClr val="12A38A"/>
                 </a:solidFill>
+                <a:latin typeface="BIZ UDPゴシック"/>
+                <a:ea typeface="BIZ UDPゴシック"/>
+                <a:cs typeface="BIZ UDPゴシック"/>
               </a:rPr>
               <a:t>C: + Avatar</a:t>
             </a:r>
@@ -17139,6 +17853,9 @@
                 <a:solidFill>
                   <a:srgbClr val="5A6676"/>
                 </a:solidFill>
+                <a:latin typeface="BIZ UDPゴシック"/>
+                <a:ea typeface="BIZ UDPゴシック"/>
+                <a:cs typeface="BIZ UDPゴシック"/>
               </a:rPr>
               <a:t>Log only</a:t>
             </a:r>
@@ -17202,6 +17919,9 @@
                 <a:solidFill>
                   <a:srgbClr val="0B3C6E"/>
                 </a:solidFill>
+                <a:latin typeface="BIZ UDPゴシック"/>
+                <a:ea typeface="BIZ UDPゴシック"/>
+                <a:cs typeface="BIZ UDPゴシック"/>
               </a:rPr>
               <a:t>Proposals + possible-selves avatar + log</a:t>
             </a:r>
@@ -17299,6 +18019,9 @@
                 <a:solidFill>
                   <a:srgbClr val="FFFFFF"/>
                 </a:solidFill>
+                <a:latin typeface="BIZ UDPゴシック"/>
+                <a:ea typeface="BIZ UDPゴシック"/>
+                <a:cs typeface="BIZ UDPゴシック"/>
               </a:rPr>
               <a:t>Stratified randomization</a:t>
             </a:r>
@@ -17506,6 +18229,9 @@
                 <a:solidFill>
                   <a:srgbClr val="0B3C6E"/>
                 </a:solidFill>
+                <a:latin typeface="BIZ UDPゴシック"/>
+                <a:ea typeface="BIZ UDPゴシック"/>
+                <a:cs typeface="BIZ UDPゴシック"/>
               </a:rPr>
               <a:t>WHO-5</a:t>
             </a:r>
@@ -17588,6 +18314,9 @@
                           <a:solidFill>
                             <a:srgbClr val="FFFFFF"/>
                           </a:solidFill>
+                          <a:latin typeface="BIZ UDPゴシック"/>
+                          <a:ea typeface="BIZ UDPゴシック"/>
+                          <a:cs typeface="BIZ UDPゴシック"/>
                         </a:rPr>
                         <a:t>Measure</a:t>
                       </a:r>
@@ -17637,6 +18366,9 @@
                           <a:solidFill>
                             <a:srgbClr val="FFFFFF"/>
                           </a:solidFill>
+                          <a:latin typeface="BIZ UDPゴシック"/>
+                          <a:ea typeface="BIZ UDPゴシック"/>
+                          <a:cs typeface="BIZ UDPゴシック"/>
                         </a:rPr>
                         <a:t>Analysis</a:t>
                       </a:r>
@@ -17688,6 +18420,9 @@
                           <a:solidFill>
                             <a:srgbClr val="24303F"/>
                           </a:solidFill>
+                          <a:latin typeface="BIZ UDPゴシック"/>
+                          <a:ea typeface="BIZ UDPゴシック"/>
+                          <a:cs typeface="BIZ UDPゴシック"/>
                         </a:rPr>
                         <a:t>RQ3 (primary)</a:t>
                       </a:r>
@@ -17737,6 +18472,9 @@
                           <a:solidFill>
                             <a:srgbClr val="24303F"/>
                           </a:solidFill>
+                          <a:latin typeface="BIZ UDPゴシック"/>
+                          <a:ea typeface="BIZ UDPゴシック"/>
+                          <a:cs typeface="BIZ UDPゴシック"/>
                         </a:rPr>
                         <a:t>WHO-5 at week 6, ANCOVA adjusting for week 2; C vs B and B vs A with Holm correction</a:t>
                       </a:r>
@@ -17788,6 +18526,9 @@
                           <a:solidFill>
                             <a:srgbClr val="24303F"/>
                           </a:solidFill>
+                          <a:latin typeface="BIZ UDPゴシック"/>
+                          <a:ea typeface="BIZ UDPゴシック"/>
+                          <a:cs typeface="BIZ UDPゴシック"/>
                         </a:rPr>
                         <a:t>RQ2 · RQ1</a:t>
                       </a:r>
@@ -17837,6 +18578,9 @@
                           <a:solidFill>
                             <a:srgbClr val="24303F"/>
                           </a:solidFill>
+                          <a:latin typeface="BIZ UDPゴシック"/>
+                          <a:ea typeface="BIZ UDPゴシック"/>
+                          <a:cs typeface="BIZ UDPゴシック"/>
                         </a:rPr>
                         <a:t>Weekly follow-through (logistic mixed model) · forecast error at week 6</a:t>
                       </a:r>
@@ -17924,12 +18668,12 @@
     </a:clrScheme>
     <a:fontScheme name="mixlab">
       <a:majorFont>
-        <a:latin typeface="Arial"/>
+        <a:latin typeface="BIZ UDPゴシック"/>
         <a:ea typeface="BIZ UDPゴシック"/>
         <a:cs typeface=""/>
       </a:majorFont>
       <a:minorFont>
-        <a:latin typeface="Arial"/>
+        <a:latin typeface="BIZ UDPゴシック"/>
         <a:ea typeface="BIZ UDPゴシック"/>
         <a:cs typeface=""/>
       </a:minorFont>
@@ -18125,7 +18869,7 @@
     </a:clrScheme>
     <a:fontScheme name="Office">
       <a:majorFont>
-        <a:latin typeface="游ゴシック Light" panose="020F0302020204030204"/>
+        <a:latin typeface="BIZ UDPゴシック"/>
         <a:ea typeface=""/>
         <a:cs typeface=""/>
         <a:font script="Jpan" typeface="游ゴシック Light"/>
@@ -18160,7 +18904,7 @@
         <a:font script="Geor" typeface="Sylfaen"/>
       </a:majorFont>
       <a:minorFont>
-        <a:latin typeface="游ゴシック" panose="020F0502020204030204"/>
+        <a:latin typeface="BIZ UDPゴシック"/>
         <a:ea typeface=""/>
         <a:cs typeface=""/>
         <a:font script="Jpan" typeface="游ゴシック"/>
